--- a/MAF_modernization_agent_design.pptx
+++ b/MAF_modernization_agent_design.pptx
@@ -22,9 +22,10 @@
     <p:sldId id="270" r:id="rId16"/>
     <p:sldId id="271" r:id="rId17"/>
     <p:sldId id="272" r:id="rId18"/>
+    <p:sldId id="273" r:id="rId19"/>
   </p:sldIdLst>
   <p:notesMasterIdLst>
-    <p:notesMasterId r:id="rId19"/>
+    <p:notesMasterId r:id="rId20"/>
   </p:notesMasterIdLst>
   <p:sldSz cx="12192000" cy="6858000"/>
   <p:notesSz cx="6858000" cy="12192000"/>
@@ -1246,6 +1247,94 @@
             <a:fld id="{F7021451-1387-4CA6-816F-3879F97B5CBC}" type="slidenum">
               <a:rPr lang="en-US"/>
               <a:t>17</a:t>
+            </a:fld>
+            <a:endParaRPr lang="en-US"/>
+          </a:p>
+        </p:txBody>
+      </p:sp>
+    </p:spTree>
+    <p:extLst>
+      <p:ext uri="{BB962C8B-B14F-4D97-AF65-F5344CB8AC3E}">
+        <p14:creationId xmlns:p14="http://schemas.microsoft.com/office/powerpoint/2010/main" val="1024086991"/>
+      </p:ext>
+    </p:extLst>
+  </p:cSld>
+  <p:clrMapOvr>
+    <a:masterClrMapping/>
+  </p:clrMapOvr>
+</p:notes>
+</file>
+
+<file path=ppt/notesSlides/notesSlide18.xml><?xml version="1.0" encoding="utf-8"?>
+<p:notes xmlns:a="http://schemas.openxmlformats.org/drawingml/2006/main" xmlns:r="http://schemas.openxmlformats.org/officeDocument/2006/relationships" xmlns:p="http://schemas.openxmlformats.org/presentationml/2006/main">
+  <p:cSld>
+    <p:spTree>
+      <p:nvGrpSpPr>
+        <p:cNvPr id="1" name=""/>
+        <p:cNvGrpSpPr/>
+        <p:nvPr/>
+      </p:nvGrpSpPr>
+      <p:grpSpPr>
+        <a:xfrm>
+          <a:off x="0" y="0"/>
+          <a:ext cx="0" cy="0"/>
+          <a:chOff x="0" y="0"/>
+          <a:chExt cx="0" cy="0"/>
+        </a:xfrm>
+      </p:grpSpPr>
+      <p:sp>
+        <p:nvSpPr>
+          <p:cNvPr id="2" name="Slide Image Placeholder 1"/>
+          <p:cNvSpPr>
+            <a:spLocks noGrp="1" noRot="1" noChangeAspect="1"/>
+          </p:cNvSpPr>
+          <p:nvPr>
+            <p:ph type="sldImg"/>
+          </p:nvPr>
+        </p:nvSpPr>
+        <p:spPr/>
+      </p:sp>
+      <p:sp>
+        <p:nvSpPr>
+          <p:cNvPr id="3" name="Notes Placeholder 2"/>
+          <p:cNvSpPr>
+            <a:spLocks noGrp="1"/>
+          </p:cNvSpPr>
+          <p:nvPr>
+            <p:ph type="body" idx="1"/>
+          </p:nvPr>
+        </p:nvSpPr>
+        <p:spPr/>
+        <p:txBody>
+          <a:bodyPr/>
+          <a:lstStyle/>
+          <a:p>
+            <a:r>
+              <a:rPr lang="en-US" dirty="0"/>
+              <a:t/>
+            </a:r>
+            <a:endParaRPr lang="en-US" dirty="0"/>
+          </a:p>
+        </p:txBody>
+      </p:sp>
+      <p:sp>
+        <p:nvSpPr>
+          <p:cNvPr id="4" name="Slide Number Placeholder 3"/>
+          <p:cNvSpPr>
+            <a:spLocks noGrp="1"/>
+          </p:cNvSpPr>
+          <p:nvPr>
+            <p:ph type="sldNum" sz="quarter" idx="10"/>
+          </p:nvPr>
+        </p:nvSpPr>
+        <p:spPr/>
+        <p:txBody>
+          <a:bodyPr/>
+          <a:lstStyle/>
+          <a:p>
+            <a:fld id="{F7021451-1387-4CA6-816F-3879F97B5CBC}" type="slidenum">
+              <a:rPr lang="en-US"/>
+              <a:t>18</a:t>
             </a:fld>
             <a:endParaRPr lang="en-US"/>
           </a:p>
@@ -3232,6 +3321,1150 @@
     <p:bg>
       <p:bgPr>
         <a:solidFill>
+          <a:srgbClr val="FFFFFF"/>
+        </a:solidFill>
+      </p:bgPr>
+    </p:bg>
+    <p:spTree>
+      <p:nvGrpSpPr>
+        <p:cNvPr id="1" name=""/>
+        <p:cNvGrpSpPr/>
+        <p:nvPr/>
+      </p:nvGrpSpPr>
+      <p:grpSpPr>
+        <a:xfrm>
+          <a:off x="0" y="0"/>
+          <a:ext cx="0" cy="0"/>
+          <a:chOff x="0" y="0"/>
+          <a:chExt cx="0" cy="0"/>
+        </a:xfrm>
+      </p:grpSpPr>
+      <p:sp>
+        <p:nvSpPr>
+          <p:cNvPr id="2" name="Shape 0"/>
+          <p:cNvSpPr/>
+          <p:nvPr/>
+        </p:nvSpPr>
+        <p:spPr>
+          <a:xfrm>
+            <a:off x="0" y="0"/>
+            <a:ext cx="164592" cy="6858000"/>
+          </a:xfrm>
+          <a:prstGeom prst="rect">
+            <a:avLst/>
+          </a:prstGeom>
+          <a:solidFill>
+            <a:srgbClr val="2BB0ED"/>
+          </a:solidFill>
+          <a:ln/>
+        </p:spPr>
+      </p:sp>
+      <p:sp>
+        <p:nvSpPr>
+          <p:cNvPr id="3" name="Text 1"/>
+          <p:cNvSpPr/>
+          <p:nvPr/>
+        </p:nvSpPr>
+        <p:spPr>
+          <a:xfrm>
+            <a:off x="502920" y="320040"/>
+            <a:ext cx="10972800" cy="274320"/>
+          </a:xfrm>
+          <a:prstGeom prst="rect">
+            <a:avLst/>
+          </a:prstGeom>
+          <a:noFill/>
+          <a:ln/>
+        </p:spPr>
+        <p:txBody>
+          <a:bodyPr wrap="square" lIns="0" tIns="0" rIns="0" bIns="0" rtlCol="0" anchor="ctr"/>
+          <a:lstStyle/>
+          <a:p>
+            <a:pPr indent="0" marL="0">
+              <a:buNone/>
+            </a:pPr>
+            <a:r>
+              <a:rPr lang="en-US" sz="1100" b="1" spc="400" kern="0" dirty="0">
+                <a:solidFill>
+                  <a:srgbClr val="FF9900"/>
+                </a:solidFill>
+                <a:latin typeface="Arial" pitchFamily="34" charset="0"/>
+                <a:ea typeface="Arial" pitchFamily="34" charset="-122"/>
+                <a:cs typeface="Arial" pitchFamily="34" charset="-120"/>
+              </a:rPr>
+              <a:t>HARNESS COMPONENT</a:t>
+            </a:r>
+            <a:endParaRPr lang="en-US" sz="1100" dirty="0"/>
+          </a:p>
+        </p:txBody>
+      </p:sp>
+      <p:sp>
+        <p:nvSpPr>
+          <p:cNvPr id="4" name="Text 2"/>
+          <p:cNvSpPr/>
+          <p:nvPr/>
+        </p:nvSpPr>
+        <p:spPr>
+          <a:xfrm>
+            <a:off x="502920" y="548640"/>
+            <a:ext cx="11247120" cy="731520"/>
+          </a:xfrm>
+          <a:prstGeom prst="rect">
+            <a:avLst/>
+          </a:prstGeom>
+          <a:noFill/>
+          <a:ln/>
+        </p:spPr>
+        <p:txBody>
+          <a:bodyPr wrap="square" lIns="0" tIns="0" rIns="0" bIns="0" rtlCol="0" anchor="ctr"/>
+          <a:lstStyle/>
+          <a:p>
+            <a:pPr indent="0" marL="0">
+              <a:buNone/>
+            </a:pPr>
+            <a:r>
+              <a:rPr lang="en-US" sz="3000" b="1" dirty="0">
+                <a:solidFill>
+                  <a:srgbClr val="0F1F3D"/>
+                </a:solidFill>
+                <a:latin typeface="Georgia" pitchFamily="34" charset="0"/>
+                <a:ea typeface="Georgia" pitchFamily="34" charset="-122"/>
+                <a:cs typeface="Georgia" pitchFamily="34" charset="-120"/>
+              </a:rPr>
+              <a:t>Context Engineering — Fit the Code into the Window</a:t>
+            </a:r>
+            <a:endParaRPr lang="en-US" sz="3000" dirty="0"/>
+          </a:p>
+        </p:txBody>
+      </p:sp>
+      <p:sp>
+        <p:nvSpPr>
+          <p:cNvPr id="5" name="Shape 3"/>
+          <p:cNvSpPr/>
+          <p:nvPr/>
+        </p:nvSpPr>
+        <p:spPr>
+          <a:xfrm>
+            <a:off x="502920" y="1554480"/>
+            <a:ext cx="3657600" cy="2194560"/>
+          </a:xfrm>
+          <a:prstGeom prst="rect">
+            <a:avLst/>
+          </a:prstGeom>
+          <a:solidFill>
+            <a:srgbClr val="F5F7FA"/>
+          </a:solidFill>
+          <a:ln w="9525">
+            <a:solidFill>
+              <a:srgbClr val="CADCFC"/>
+            </a:solidFill>
+            <a:prstDash val="solid"/>
+          </a:ln>
+        </p:spPr>
+      </p:sp>
+      <p:sp>
+        <p:nvSpPr>
+          <p:cNvPr id="6" name="Shape 4"/>
+          <p:cNvSpPr/>
+          <p:nvPr/>
+        </p:nvSpPr>
+        <p:spPr>
+          <a:xfrm>
+            <a:off x="502920" y="1554480"/>
+            <a:ext cx="3657600" cy="640080"/>
+          </a:xfrm>
+          <a:prstGeom prst="rect">
+            <a:avLst/>
+          </a:prstGeom>
+          <a:solidFill>
+            <a:srgbClr val="0F1F3D"/>
+          </a:solidFill>
+          <a:ln/>
+        </p:spPr>
+      </p:sp>
+      <p:sp>
+        <p:nvSpPr>
+          <p:cNvPr id="7" name="Text 5"/>
+          <p:cNvSpPr/>
+          <p:nvPr/>
+        </p:nvSpPr>
+        <p:spPr>
+          <a:xfrm>
+            <a:off x="685800" y="1645920"/>
+            <a:ext cx="3383280" cy="274320"/>
+          </a:xfrm>
+          <a:prstGeom prst="rect">
+            <a:avLst/>
+          </a:prstGeom>
+          <a:noFill/>
+          <a:ln/>
+        </p:spPr>
+        <p:txBody>
+          <a:bodyPr wrap="square" lIns="0" tIns="0" rIns="0" bIns="0" rtlCol="0" anchor="ctr"/>
+          <a:lstStyle/>
+          <a:p>
+            <a:pPr indent="0" marL="0">
+              <a:buNone/>
+            </a:pPr>
+            <a:r>
+              <a:rPr lang="en-US" sz="1250" b="1" dirty="0">
+                <a:solidFill>
+                  <a:srgbClr val="2BB0ED"/>
+                </a:solidFill>
+                <a:latin typeface="Consolas" pitchFamily="34" charset="0"/>
+                <a:ea typeface="Consolas" pitchFamily="34" charset="-122"/>
+                <a:cs typeface="Consolas" pitchFamily="34" charset="-120"/>
+              </a:rPr>
+              <a:t>chunker.py</a:t>
+            </a:r>
+            <a:endParaRPr lang="en-US" sz="1250" dirty="0"/>
+          </a:p>
+        </p:txBody>
+      </p:sp>
+      <p:sp>
+        <p:nvSpPr>
+          <p:cNvPr id="8" name="Text 6"/>
+          <p:cNvSpPr/>
+          <p:nvPr/>
+        </p:nvSpPr>
+        <p:spPr>
+          <a:xfrm>
+            <a:off x="685800" y="1920240"/>
+            <a:ext cx="3383280" cy="228600"/>
+          </a:xfrm>
+          <a:prstGeom prst="rect">
+            <a:avLst/>
+          </a:prstGeom>
+          <a:noFill/>
+          <a:ln/>
+        </p:spPr>
+        <p:txBody>
+          <a:bodyPr wrap="square" lIns="0" tIns="0" rIns="0" bIns="0" rtlCol="0" anchor="ctr"/>
+          <a:lstStyle/>
+          <a:p>
+            <a:pPr indent="0" marL="0">
+              <a:buNone/>
+            </a:pPr>
+            <a:r>
+              <a:rPr lang="en-US" sz="1000" i="1" dirty="0">
+                <a:solidFill>
+                  <a:srgbClr val="CADCFC"/>
+                </a:solidFill>
+              </a:rPr>
+              <a:t>Semantic file splitting</a:t>
+            </a:r>
+            <a:endParaRPr lang="en-US" sz="1000" dirty="0"/>
+          </a:p>
+        </p:txBody>
+      </p:sp>
+      <p:sp>
+        <p:nvSpPr>
+          <p:cNvPr id="9" name="Text 7"/>
+          <p:cNvSpPr/>
+          <p:nvPr/>
+        </p:nvSpPr>
+        <p:spPr>
+          <a:xfrm>
+            <a:off x="685800" y="2331720"/>
+            <a:ext cx="3383280" cy="1371600"/>
+          </a:xfrm>
+          <a:prstGeom prst="rect">
+            <a:avLst/>
+          </a:prstGeom>
+          <a:noFill/>
+          <a:ln/>
+        </p:spPr>
+        <p:txBody>
+          <a:bodyPr wrap="square" lIns="0" tIns="0" rIns="0" bIns="0" rtlCol="0" anchor="t"/>
+          <a:lstStyle/>
+          <a:p>
+            <a:pPr indent="0" marL="0">
+              <a:buNone/>
+            </a:pPr>
+            <a:r>
+              <a:rPr lang="en-US" sz="1050" dirty="0">
+                <a:solidFill>
+                  <a:srgbClr val="3A4A60"/>
+                </a:solidFill>
+              </a:rPr>
+              <a:t>AST-boundary-aware chunks. Never breaks a function mid-body; groups related imports+decorator+def blocks.</a:t>
+            </a:r>
+            <a:endParaRPr lang="en-US" sz="1050" dirty="0"/>
+          </a:p>
+        </p:txBody>
+      </p:sp>
+      <p:sp>
+        <p:nvSpPr>
+          <p:cNvPr id="10" name="Shape 8"/>
+          <p:cNvSpPr/>
+          <p:nvPr/>
+        </p:nvSpPr>
+        <p:spPr>
+          <a:xfrm>
+            <a:off x="4297680" y="1554480"/>
+            <a:ext cx="3657600" cy="2194560"/>
+          </a:xfrm>
+          <a:prstGeom prst="rect">
+            <a:avLst/>
+          </a:prstGeom>
+          <a:solidFill>
+            <a:srgbClr val="F5F7FA"/>
+          </a:solidFill>
+          <a:ln w="9525">
+            <a:solidFill>
+              <a:srgbClr val="CADCFC"/>
+            </a:solidFill>
+            <a:prstDash val="solid"/>
+          </a:ln>
+        </p:spPr>
+      </p:sp>
+      <p:sp>
+        <p:nvSpPr>
+          <p:cNvPr id="11" name="Shape 9"/>
+          <p:cNvSpPr/>
+          <p:nvPr/>
+        </p:nvSpPr>
+        <p:spPr>
+          <a:xfrm>
+            <a:off x="4297680" y="1554480"/>
+            <a:ext cx="3657600" cy="640080"/>
+          </a:xfrm>
+          <a:prstGeom prst="rect">
+            <a:avLst/>
+          </a:prstGeom>
+          <a:solidFill>
+            <a:srgbClr val="0F1F3D"/>
+          </a:solidFill>
+          <a:ln/>
+        </p:spPr>
+      </p:sp>
+      <p:sp>
+        <p:nvSpPr>
+          <p:cNvPr id="12" name="Text 10"/>
+          <p:cNvSpPr/>
+          <p:nvPr/>
+        </p:nvSpPr>
+        <p:spPr>
+          <a:xfrm>
+            <a:off x="4480560" y="1645920"/>
+            <a:ext cx="3383280" cy="274320"/>
+          </a:xfrm>
+          <a:prstGeom prst="rect">
+            <a:avLst/>
+          </a:prstGeom>
+          <a:noFill/>
+          <a:ln/>
+        </p:spPr>
+        <p:txBody>
+          <a:bodyPr wrap="square" lIns="0" tIns="0" rIns="0" bIns="0" rtlCol="0" anchor="ctr"/>
+          <a:lstStyle/>
+          <a:p>
+            <a:pPr indent="0" marL="0">
+              <a:buNone/>
+            </a:pPr>
+            <a:r>
+              <a:rPr lang="en-US" sz="1250" b="1" dirty="0">
+                <a:solidFill>
+                  <a:srgbClr val="2BB0ED"/>
+                </a:solidFill>
+                <a:latin typeface="Consolas" pitchFamily="34" charset="0"/>
+                <a:ea typeface="Consolas" pitchFamily="34" charset="-122"/>
+                <a:cs typeface="Consolas" pitchFamily="34" charset="-120"/>
+              </a:rPr>
+              <a:t>compressor.py</a:t>
+            </a:r>
+            <a:endParaRPr lang="en-US" sz="1250" dirty="0"/>
+          </a:p>
+        </p:txBody>
+      </p:sp>
+      <p:sp>
+        <p:nvSpPr>
+          <p:cNvPr id="13" name="Text 11"/>
+          <p:cNvSpPr/>
+          <p:nvPr/>
+        </p:nvSpPr>
+        <p:spPr>
+          <a:xfrm>
+            <a:off x="4480560" y="1920240"/>
+            <a:ext cx="3383280" cy="228600"/>
+          </a:xfrm>
+          <a:prstGeom prst="rect">
+            <a:avLst/>
+          </a:prstGeom>
+          <a:noFill/>
+          <a:ln/>
+        </p:spPr>
+        <p:txBody>
+          <a:bodyPr wrap="square" lIns="0" tIns="0" rIns="0" bIns="0" rtlCol="0" anchor="ctr"/>
+          <a:lstStyle/>
+          <a:p>
+            <a:pPr indent="0" marL="0">
+              <a:buNone/>
+            </a:pPr>
+            <a:r>
+              <a:rPr lang="en-US" sz="1000" i="1" dirty="0">
+                <a:solidFill>
+                  <a:srgbClr val="CADCFC"/>
+                </a:solidFill>
+              </a:rPr>
+              <a:t>Progressive compression</a:t>
+            </a:r>
+            <a:endParaRPr lang="en-US" sz="1000" dirty="0"/>
+          </a:p>
+        </p:txBody>
+      </p:sp>
+      <p:sp>
+        <p:nvSpPr>
+          <p:cNvPr id="14" name="Text 12"/>
+          <p:cNvSpPr/>
+          <p:nvPr/>
+        </p:nvSpPr>
+        <p:spPr>
+          <a:xfrm>
+            <a:off x="4480560" y="2331720"/>
+            <a:ext cx="3383280" cy="1371600"/>
+          </a:xfrm>
+          <a:prstGeom prst="rect">
+            <a:avLst/>
+          </a:prstGeom>
+          <a:noFill/>
+          <a:ln/>
+        </p:spPr>
+        <p:txBody>
+          <a:bodyPr wrap="square" lIns="0" tIns="0" rIns="0" bIns="0" rtlCol="0" anchor="t"/>
+          <a:lstStyle/>
+          <a:p>
+            <a:pPr indent="0" marL="0">
+              <a:buNone/>
+            </a:pPr>
+            <a:r>
+              <a:rPr lang="en-US" sz="1050" dirty="0">
+                <a:solidFill>
+                  <a:srgbClr val="3A4A60"/>
+                </a:solidFill>
+              </a:rPr>
+              <a:t>Older turns compressed to 30% density; recent turns + current artifacts kept verbatim. Preserves decision trail.</a:t>
+            </a:r>
+            <a:endParaRPr lang="en-US" sz="1050" dirty="0"/>
+          </a:p>
+        </p:txBody>
+      </p:sp>
+      <p:sp>
+        <p:nvSpPr>
+          <p:cNvPr id="15" name="Shape 13"/>
+          <p:cNvSpPr/>
+          <p:nvPr/>
+        </p:nvSpPr>
+        <p:spPr>
+          <a:xfrm>
+            <a:off x="8092440" y="1554480"/>
+            <a:ext cx="3657600" cy="2194560"/>
+          </a:xfrm>
+          <a:prstGeom prst="rect">
+            <a:avLst/>
+          </a:prstGeom>
+          <a:solidFill>
+            <a:srgbClr val="F5F7FA"/>
+          </a:solidFill>
+          <a:ln w="9525">
+            <a:solidFill>
+              <a:srgbClr val="CADCFC"/>
+            </a:solidFill>
+            <a:prstDash val="solid"/>
+          </a:ln>
+        </p:spPr>
+      </p:sp>
+      <p:sp>
+        <p:nvSpPr>
+          <p:cNvPr id="16" name="Shape 14"/>
+          <p:cNvSpPr/>
+          <p:nvPr/>
+        </p:nvSpPr>
+        <p:spPr>
+          <a:xfrm>
+            <a:off x="8092440" y="1554480"/>
+            <a:ext cx="3657600" cy="640080"/>
+          </a:xfrm>
+          <a:prstGeom prst="rect">
+            <a:avLst/>
+          </a:prstGeom>
+          <a:solidFill>
+            <a:srgbClr val="0F1F3D"/>
+          </a:solidFill>
+          <a:ln/>
+        </p:spPr>
+      </p:sp>
+      <p:sp>
+        <p:nvSpPr>
+          <p:cNvPr id="17" name="Text 15"/>
+          <p:cNvSpPr/>
+          <p:nvPr/>
+        </p:nvSpPr>
+        <p:spPr>
+          <a:xfrm>
+            <a:off x="8275320" y="1645920"/>
+            <a:ext cx="3383280" cy="274320"/>
+          </a:xfrm>
+          <a:prstGeom prst="rect">
+            <a:avLst/>
+          </a:prstGeom>
+          <a:noFill/>
+          <a:ln/>
+        </p:spPr>
+        <p:txBody>
+          <a:bodyPr wrap="square" lIns="0" tIns="0" rIns="0" bIns="0" rtlCol="0" anchor="ctr"/>
+          <a:lstStyle/>
+          <a:p>
+            <a:pPr indent="0" marL="0">
+              <a:buNone/>
+            </a:pPr>
+            <a:r>
+              <a:rPr lang="en-US" sz="1250" b="1" dirty="0">
+                <a:solidFill>
+                  <a:srgbClr val="2BB0ED"/>
+                </a:solidFill>
+                <a:latin typeface="Consolas" pitchFamily="34" charset="0"/>
+                <a:ea typeface="Consolas" pitchFamily="34" charset="-122"/>
+                <a:cs typeface="Consolas" pitchFamily="34" charset="-120"/>
+              </a:rPr>
+              <a:t>token_estimator.py</a:t>
+            </a:r>
+            <a:endParaRPr lang="en-US" sz="1250" dirty="0"/>
+          </a:p>
+        </p:txBody>
+      </p:sp>
+      <p:sp>
+        <p:nvSpPr>
+          <p:cNvPr id="18" name="Text 16"/>
+          <p:cNvSpPr/>
+          <p:nvPr/>
+        </p:nvSpPr>
+        <p:spPr>
+          <a:xfrm>
+            <a:off x="8275320" y="1920240"/>
+            <a:ext cx="3383280" cy="228600"/>
+          </a:xfrm>
+          <a:prstGeom prst="rect">
+            <a:avLst/>
+          </a:prstGeom>
+          <a:noFill/>
+          <a:ln/>
+        </p:spPr>
+        <p:txBody>
+          <a:bodyPr wrap="square" lIns="0" tIns="0" rIns="0" bIns="0" rtlCol="0" anchor="ctr"/>
+          <a:lstStyle/>
+          <a:p>
+            <a:pPr indent="0" marL="0">
+              <a:buNone/>
+            </a:pPr>
+            <a:r>
+              <a:rPr lang="en-US" sz="1000" i="1" dirty="0">
+                <a:solidFill>
+                  <a:srgbClr val="CADCFC"/>
+                </a:solidFill>
+              </a:rPr>
+              <a:t>Budget calculator</a:t>
+            </a:r>
+            <a:endParaRPr lang="en-US" sz="1000" dirty="0"/>
+          </a:p>
+        </p:txBody>
+      </p:sp>
+      <p:sp>
+        <p:nvSpPr>
+          <p:cNvPr id="19" name="Text 17"/>
+          <p:cNvSpPr/>
+          <p:nvPr/>
+        </p:nvSpPr>
+        <p:spPr>
+          <a:xfrm>
+            <a:off x="8275320" y="2331720"/>
+            <a:ext cx="3383280" cy="1371600"/>
+          </a:xfrm>
+          <a:prstGeom prst="rect">
+            <a:avLst/>
+          </a:prstGeom>
+          <a:noFill/>
+          <a:ln/>
+        </p:spPr>
+        <p:txBody>
+          <a:bodyPr wrap="square" lIns="0" tIns="0" rIns="0" bIns="0" rtlCol="0" anchor="t"/>
+          <a:lstStyle/>
+          <a:p>
+            <a:pPr indent="0" marL="0">
+              <a:buNone/>
+            </a:pPr>
+            <a:r>
+              <a:rPr lang="en-US" sz="1050" dirty="0">
+                <a:solidFill>
+                  <a:srgbClr val="3A4A60"/>
+                </a:solidFill>
+              </a:rPr>
+              <a:t>chars ÷ 3.0 × role-multiplier. Analyzer/Reviewer → full; Coder → tighter. Used to pick model tier.</a:t>
+            </a:r>
+            <a:endParaRPr lang="en-US" sz="1050" dirty="0"/>
+          </a:p>
+        </p:txBody>
+      </p:sp>
+      <p:sp>
+        <p:nvSpPr>
+          <p:cNvPr id="20" name="Shape 18"/>
+          <p:cNvSpPr/>
+          <p:nvPr/>
+        </p:nvSpPr>
+        <p:spPr>
+          <a:xfrm>
+            <a:off x="502920" y="3886200"/>
+            <a:ext cx="3657600" cy="2194560"/>
+          </a:xfrm>
+          <a:prstGeom prst="rect">
+            <a:avLst/>
+          </a:prstGeom>
+          <a:solidFill>
+            <a:srgbClr val="F5F7FA"/>
+          </a:solidFill>
+          <a:ln w="9525">
+            <a:solidFill>
+              <a:srgbClr val="CADCFC"/>
+            </a:solidFill>
+            <a:prstDash val="solid"/>
+          </a:ln>
+        </p:spPr>
+      </p:sp>
+      <p:sp>
+        <p:nvSpPr>
+          <p:cNvPr id="21" name="Shape 19"/>
+          <p:cNvSpPr/>
+          <p:nvPr/>
+        </p:nvSpPr>
+        <p:spPr>
+          <a:xfrm>
+            <a:off x="502920" y="3886200"/>
+            <a:ext cx="3657600" cy="640080"/>
+          </a:xfrm>
+          <a:prstGeom prst="rect">
+            <a:avLst/>
+          </a:prstGeom>
+          <a:solidFill>
+            <a:srgbClr val="0F1F3D"/>
+          </a:solidFill>
+          <a:ln/>
+        </p:spPr>
+      </p:sp>
+      <p:sp>
+        <p:nvSpPr>
+          <p:cNvPr id="22" name="Text 20"/>
+          <p:cNvSpPr/>
+          <p:nvPr/>
+        </p:nvSpPr>
+        <p:spPr>
+          <a:xfrm>
+            <a:off x="685800" y="3977640"/>
+            <a:ext cx="3383280" cy="274320"/>
+          </a:xfrm>
+          <a:prstGeom prst="rect">
+            <a:avLst/>
+          </a:prstGeom>
+          <a:noFill/>
+          <a:ln/>
+        </p:spPr>
+        <p:txBody>
+          <a:bodyPr wrap="square" lIns="0" tIns="0" rIns="0" bIns="0" rtlCol="0" anchor="ctr"/>
+          <a:lstStyle/>
+          <a:p>
+            <a:pPr indent="0" marL="0">
+              <a:buNone/>
+            </a:pPr>
+            <a:r>
+              <a:rPr lang="en-US" sz="1250" b="1" dirty="0">
+                <a:solidFill>
+                  <a:srgbClr val="2BB0ED"/>
+                </a:solidFill>
+                <a:latin typeface="Consolas" pitchFamily="34" charset="0"/>
+                <a:ea typeface="Consolas" pitchFamily="34" charset="-122"/>
+                <a:cs typeface="Consolas" pitchFamily="34" charset="-120"/>
+              </a:rPr>
+              <a:t>complexity_scorer.py</a:t>
+            </a:r>
+            <a:endParaRPr lang="en-US" sz="1250" dirty="0"/>
+          </a:p>
+        </p:txBody>
+      </p:sp>
+      <p:sp>
+        <p:nvSpPr>
+          <p:cNvPr id="23" name="Text 21"/>
+          <p:cNvSpPr/>
+          <p:nvPr/>
+        </p:nvSpPr>
+        <p:spPr>
+          <a:xfrm>
+            <a:off x="685800" y="4251960"/>
+            <a:ext cx="3383280" cy="228600"/>
+          </a:xfrm>
+          <a:prstGeom prst="rect">
+            <a:avLst/>
+          </a:prstGeom>
+          <a:noFill/>
+          <a:ln/>
+        </p:spPr>
+        <p:txBody>
+          <a:bodyPr wrap="square" lIns="0" tIns="0" rIns="0" bIns="0" rtlCol="0" anchor="ctr"/>
+          <a:lstStyle/>
+          <a:p>
+            <a:pPr indent="0" marL="0">
+              <a:buNone/>
+            </a:pPr>
+            <a:r>
+              <a:rPr lang="en-US" sz="1000" i="1" dirty="0">
+                <a:solidFill>
+                  <a:srgbClr val="CADCFC"/>
+                </a:solidFill>
+              </a:rPr>
+              <a:t>12-pattern Lambda score</a:t>
+            </a:r>
+            <a:endParaRPr lang="en-US" sz="1000" dirty="0"/>
+          </a:p>
+        </p:txBody>
+      </p:sp>
+      <p:sp>
+        <p:nvSpPr>
+          <p:cNvPr id="24" name="Text 22"/>
+          <p:cNvSpPr/>
+          <p:nvPr/>
+        </p:nvSpPr>
+        <p:spPr>
+          <a:xfrm>
+            <a:off x="685800" y="4663440"/>
+            <a:ext cx="3383280" cy="1371600"/>
+          </a:xfrm>
+          <a:prstGeom prst="rect">
+            <a:avLst/>
+          </a:prstGeom>
+          <a:noFill/>
+          <a:ln/>
+        </p:spPr>
+        <p:txBody>
+          <a:bodyPr wrap="square" lIns="0" tIns="0" rIns="0" bIns="0" rtlCol="0" anchor="t"/>
+          <a:lstStyle/>
+          <a:p>
+            <a:pPr indent="0" marL="0">
+              <a:buNone/>
+            </a:pPr>
+            <a:r>
+              <a:rPr lang="en-US" sz="1050" dirty="0">
+                <a:solidFill>
+                  <a:srgbClr val="3A4A60"/>
+                </a:solidFill>
+              </a:rPr>
+              <a:t>Detects idempotency keys, stream handlers, SSM patterns, transactWrite, async fan-out. Drives speed profile selection.</a:t>
+            </a:r>
+            <a:endParaRPr lang="en-US" sz="1050" dirty="0"/>
+          </a:p>
+        </p:txBody>
+      </p:sp>
+      <p:sp>
+        <p:nvSpPr>
+          <p:cNvPr id="25" name="Shape 23"/>
+          <p:cNvSpPr/>
+          <p:nvPr/>
+        </p:nvSpPr>
+        <p:spPr>
+          <a:xfrm>
+            <a:off x="4297680" y="3886200"/>
+            <a:ext cx="3657600" cy="2194560"/>
+          </a:xfrm>
+          <a:prstGeom prst="rect">
+            <a:avLst/>
+          </a:prstGeom>
+          <a:solidFill>
+            <a:srgbClr val="F5F7FA"/>
+          </a:solidFill>
+          <a:ln w="9525">
+            <a:solidFill>
+              <a:srgbClr val="CADCFC"/>
+            </a:solidFill>
+            <a:prstDash val="solid"/>
+          </a:ln>
+        </p:spPr>
+      </p:sp>
+      <p:sp>
+        <p:nvSpPr>
+          <p:cNvPr id="26" name="Shape 24"/>
+          <p:cNvSpPr/>
+          <p:nvPr/>
+        </p:nvSpPr>
+        <p:spPr>
+          <a:xfrm>
+            <a:off x="4297680" y="3886200"/>
+            <a:ext cx="3657600" cy="640080"/>
+          </a:xfrm>
+          <a:prstGeom prst="rect">
+            <a:avLst/>
+          </a:prstGeom>
+          <a:solidFill>
+            <a:srgbClr val="0F1F3D"/>
+          </a:solidFill>
+          <a:ln/>
+        </p:spPr>
+      </p:sp>
+      <p:sp>
+        <p:nvSpPr>
+          <p:cNvPr id="27" name="Text 25"/>
+          <p:cNvSpPr/>
+          <p:nvPr/>
+        </p:nvSpPr>
+        <p:spPr>
+          <a:xfrm>
+            <a:off x="4480560" y="3977640"/>
+            <a:ext cx="3383280" cy="274320"/>
+          </a:xfrm>
+          <a:prstGeom prst="rect">
+            <a:avLst/>
+          </a:prstGeom>
+          <a:noFill/>
+          <a:ln/>
+        </p:spPr>
+        <p:txBody>
+          <a:bodyPr wrap="square" lIns="0" tIns="0" rIns="0" bIns="0" rtlCol="0" anchor="ctr"/>
+          <a:lstStyle/>
+          <a:p>
+            <a:pPr indent="0" marL="0">
+              <a:buNone/>
+            </a:pPr>
+            <a:r>
+              <a:rPr lang="en-US" sz="1250" b="1" dirty="0">
+                <a:solidFill>
+                  <a:srgbClr val="2BB0ED"/>
+                </a:solidFill>
+                <a:latin typeface="Consolas" pitchFamily="34" charset="0"/>
+                <a:ea typeface="Consolas" pitchFamily="34" charset="-122"/>
+                <a:cs typeface="Consolas" pitchFamily="34" charset="-120"/>
+              </a:rPr>
+              <a:t>AGENTS.md injection</a:t>
+            </a:r>
+            <a:endParaRPr lang="en-US" sz="1250" dirty="0"/>
+          </a:p>
+        </p:txBody>
+      </p:sp>
+      <p:sp>
+        <p:nvSpPr>
+          <p:cNvPr id="28" name="Text 26"/>
+          <p:cNvSpPr/>
+          <p:nvPr/>
+        </p:nvSpPr>
+        <p:spPr>
+          <a:xfrm>
+            <a:off x="4480560" y="4251960"/>
+            <a:ext cx="3383280" cy="228600"/>
+          </a:xfrm>
+          <a:prstGeom prst="rect">
+            <a:avLst/>
+          </a:prstGeom>
+          <a:noFill/>
+          <a:ln/>
+        </p:spPr>
+        <p:txBody>
+          <a:bodyPr wrap="square" lIns="0" tIns="0" rIns="0" bIns="0" rtlCol="0" anchor="ctr"/>
+          <a:lstStyle/>
+          <a:p>
+            <a:pPr indent="0" marL="0">
+              <a:buNone/>
+            </a:pPr>
+            <a:r>
+              <a:rPr lang="en-US" sz="1000" i="1" dirty="0">
+                <a:solidFill>
+                  <a:srgbClr val="CADCFC"/>
+                </a:solidFill>
+              </a:rPr>
+              <a:t>Repo + module context</a:t>
+            </a:r>
+            <a:endParaRPr lang="en-US" sz="1000" dirty="0"/>
+          </a:p>
+        </p:txBody>
+      </p:sp>
+      <p:sp>
+        <p:nvSpPr>
+          <p:cNvPr id="29" name="Text 27"/>
+          <p:cNvSpPr/>
+          <p:nvPr/>
+        </p:nvSpPr>
+        <p:spPr>
+          <a:xfrm>
+            <a:off x="4480560" y="4663440"/>
+            <a:ext cx="3383280" cy="1371600"/>
+          </a:xfrm>
+          <a:prstGeom prst="rect">
+            <a:avLst/>
+          </a:prstGeom>
+          <a:noFill/>
+          <a:ln/>
+        </p:spPr>
+        <p:txBody>
+          <a:bodyPr wrap="square" lIns="0" tIns="0" rIns="0" bIns="0" rtlCol="0" anchor="t"/>
+          <a:lstStyle/>
+          <a:p>
+            <a:pPr indent="0" marL="0">
+              <a:buNone/>
+            </a:pPr>
+            <a:r>
+              <a:rPr lang="en-US" sz="1050" dirty="0">
+                <a:solidFill>
+                  <a:srgbClr val="3A4A60"/>
+                </a:solidFill>
+              </a:rPr>
+              <a:t>Repo-level and module-level AGENTS.md appended after quality-principles, learned-rules, program.md. Module overrides win.</a:t>
+            </a:r>
+            <a:endParaRPr lang="en-US" sz="1050" dirty="0"/>
+          </a:p>
+        </p:txBody>
+      </p:sp>
+      <p:sp>
+        <p:nvSpPr>
+          <p:cNvPr id="30" name="Shape 28"/>
+          <p:cNvSpPr/>
+          <p:nvPr/>
+        </p:nvSpPr>
+        <p:spPr>
+          <a:xfrm>
+            <a:off x="8092440" y="3886200"/>
+            <a:ext cx="3657600" cy="2194560"/>
+          </a:xfrm>
+          <a:prstGeom prst="rect">
+            <a:avLst/>
+          </a:prstGeom>
+          <a:solidFill>
+            <a:srgbClr val="F5F7FA"/>
+          </a:solidFill>
+          <a:ln w="9525">
+            <a:solidFill>
+              <a:srgbClr val="CADCFC"/>
+            </a:solidFill>
+            <a:prstDash val="solid"/>
+          </a:ln>
+        </p:spPr>
+      </p:sp>
+      <p:sp>
+        <p:nvSpPr>
+          <p:cNvPr id="31" name="Shape 29"/>
+          <p:cNvSpPr/>
+          <p:nvPr/>
+        </p:nvSpPr>
+        <p:spPr>
+          <a:xfrm>
+            <a:off x="8092440" y="3886200"/>
+            <a:ext cx="3657600" cy="640080"/>
+          </a:xfrm>
+          <a:prstGeom prst="rect">
+            <a:avLst/>
+          </a:prstGeom>
+          <a:solidFill>
+            <a:srgbClr val="0F1F3D"/>
+          </a:solidFill>
+          <a:ln/>
+        </p:spPr>
+      </p:sp>
+      <p:sp>
+        <p:nvSpPr>
+          <p:cNvPr id="32" name="Text 30"/>
+          <p:cNvSpPr/>
+          <p:nvPr/>
+        </p:nvSpPr>
+        <p:spPr>
+          <a:xfrm>
+            <a:off x="8275320" y="3977640"/>
+            <a:ext cx="3383280" cy="274320"/>
+          </a:xfrm>
+          <a:prstGeom prst="rect">
+            <a:avLst/>
+          </a:prstGeom>
+          <a:noFill/>
+          <a:ln/>
+        </p:spPr>
+        <p:txBody>
+          <a:bodyPr wrap="square" lIns="0" tIns="0" rIns="0" bIns="0" rtlCol="0" anchor="ctr"/>
+          <a:lstStyle/>
+          <a:p>
+            <a:pPr indent="0" marL="0">
+              <a:buNone/>
+            </a:pPr>
+            <a:r>
+              <a:rPr lang="en-US" sz="1250" b="1" dirty="0">
+                <a:solidFill>
+                  <a:srgbClr val="2BB0ED"/>
+                </a:solidFill>
+                <a:latin typeface="Consolas" pitchFamily="34" charset="0"/>
+                <a:ea typeface="Consolas" pitchFamily="34" charset="-122"/>
+                <a:cs typeface="Consolas" pitchFamily="34" charset="-120"/>
+              </a:rPr>
+              <a:t>Stage prompt layering</a:t>
+            </a:r>
+            <a:endParaRPr lang="en-US" sz="1250" dirty="0"/>
+          </a:p>
+        </p:txBody>
+      </p:sp>
+      <p:sp>
+        <p:nvSpPr>
+          <p:cNvPr id="33" name="Text 31"/>
+          <p:cNvSpPr/>
+          <p:nvPr/>
+        </p:nvSpPr>
+        <p:spPr>
+          <a:xfrm>
+            <a:off x="8275320" y="4251960"/>
+            <a:ext cx="3383280" cy="228600"/>
+          </a:xfrm>
+          <a:prstGeom prst="rect">
+            <a:avLst/>
+          </a:prstGeom>
+          <a:noFill/>
+          <a:ln/>
+        </p:spPr>
+        <p:txBody>
+          <a:bodyPr wrap="square" lIns="0" tIns="0" rIns="0" bIns="0" rtlCol="0" anchor="ctr"/>
+          <a:lstStyle/>
+          <a:p>
+            <a:pPr indent="0" marL="0">
+              <a:buNone/>
+            </a:pPr>
+            <a:r>
+              <a:rPr lang="en-US" sz="1000" i="1" dirty="0">
+                <a:solidFill>
+                  <a:srgbClr val="CADCFC"/>
+                </a:solidFill>
+              </a:rPr>
+              <a:t>Deterministic order</a:t>
+            </a:r>
+            <a:endParaRPr lang="en-US" sz="1000" dirty="0"/>
+          </a:p>
+        </p:txBody>
+      </p:sp>
+      <p:sp>
+        <p:nvSpPr>
+          <p:cNvPr id="34" name="Text 32"/>
+          <p:cNvSpPr/>
+          <p:nvPr/>
+        </p:nvSpPr>
+        <p:spPr>
+          <a:xfrm>
+            <a:off x="8275320" y="4663440"/>
+            <a:ext cx="3383280" cy="1371600"/>
+          </a:xfrm>
+          <a:prstGeom prst="rect">
+            <a:avLst/>
+          </a:prstGeom>
+          <a:noFill/>
+          <a:ln/>
+        </p:spPr>
+        <p:txBody>
+          <a:bodyPr wrap="square" lIns="0" tIns="0" rIns="0" bIns="0" rtlCol="0" anchor="t"/>
+          <a:lstStyle/>
+          <a:p>
+            <a:pPr indent="0" marL="0">
+              <a:buNone/>
+            </a:pPr>
+            <a:r>
+              <a:rPr lang="en-US" sz="1050" dirty="0">
+                <a:solidFill>
+                  <a:srgbClr val="3A4A60"/>
+                </a:solidFill>
+              </a:rPr>
+              <a:t>1 Stage prompt  →  2 quality-principles  →  3 learned-rules  →  4 program.md  →  5 repo AGENTS.md  →  6 module AGENTS.md.</a:t>
+            </a:r>
+            <a:endParaRPr lang="en-US" sz="1050" dirty="0"/>
+          </a:p>
+        </p:txBody>
+      </p:sp>
+      <p:sp>
+        <p:nvSpPr>
+          <p:cNvPr id="35" name="Text 33"/>
+          <p:cNvSpPr/>
+          <p:nvPr/>
+        </p:nvSpPr>
+        <p:spPr>
+          <a:xfrm>
+            <a:off x="502920" y="6537960"/>
+            <a:ext cx="9144000" cy="274320"/>
+          </a:xfrm>
+          <a:prstGeom prst="rect">
+            <a:avLst/>
+          </a:prstGeom>
+          <a:noFill/>
+          <a:ln/>
+        </p:spPr>
+        <p:txBody>
+          <a:bodyPr wrap="square" lIns="0" tIns="0" rIns="0" bIns="0" rtlCol="0" anchor="ctr"/>
+          <a:lstStyle/>
+          <a:p>
+            <a:pPr indent="0" marL="0">
+              <a:buNone/>
+            </a:pPr>
+            <a:r>
+              <a:rPr lang="en-US" sz="900" dirty="0">
+                <a:solidFill>
+                  <a:srgbClr val="8B9CB8"/>
+                </a:solidFill>
+                <a:latin typeface="Arial" pitchFamily="34" charset="0"/>
+                <a:ea typeface="Arial" pitchFamily="34" charset="-122"/>
+                <a:cs typeface="Arial" pitchFamily="34" charset="-120"/>
+              </a:rPr>
+              <a:t>MAF Modernization Agent  •  AWS Lambda → Azure Functions  •  Design v1.0</a:t>
+            </a:r>
+            <a:endParaRPr lang="en-US" sz="900" dirty="0"/>
+          </a:p>
+        </p:txBody>
+      </p:sp>
+      <p:sp>
+        <p:nvSpPr>
+          <p:cNvPr id="36" name="Text 34"/>
+          <p:cNvSpPr/>
+          <p:nvPr/>
+        </p:nvSpPr>
+        <p:spPr>
+          <a:xfrm>
+            <a:off x="11521440" y="6537960"/>
+            <a:ext cx="457200" cy="274320"/>
+          </a:xfrm>
+          <a:prstGeom prst="rect">
+            <a:avLst/>
+          </a:prstGeom>
+          <a:noFill/>
+          <a:ln/>
+        </p:spPr>
+        <p:txBody>
+          <a:bodyPr wrap="square" lIns="0" tIns="0" rIns="0" bIns="0" rtlCol="0" anchor="ctr"/>
+          <a:lstStyle/>
+          <a:p>
+            <a:pPr algn="r" indent="0" marL="0">
+              <a:buNone/>
+            </a:pPr>
+            <a:r>
+              <a:rPr lang="en-US" sz="900" dirty="0">
+                <a:solidFill>
+                  <a:srgbClr val="8B9CB8"/>
+                </a:solidFill>
+                <a:latin typeface="Arial" pitchFamily="34" charset="0"/>
+                <a:ea typeface="Arial" pitchFamily="34" charset="-122"/>
+                <a:cs typeface="Arial" pitchFamily="34" charset="-120"/>
+              </a:rPr>
+              <a:t>10</a:t>
+            </a:r>
+            <a:endParaRPr lang="en-US" sz="900" dirty="0"/>
+          </a:p>
+        </p:txBody>
+      </p:sp>
+    </p:spTree>
+  </p:cSld>
+  <p:clrMapOvr>
+    <a:masterClrMapping/>
+  </p:clrMapOvr>
+</p:sld>
+</file>
+
+<file path=ppt/slides/slide11.xml><?xml version="1.0" encoding="utf-8"?>
+<p:sld xmlns:a="http://schemas.openxmlformats.org/drawingml/2006/main" xmlns:r="http://schemas.openxmlformats.org/officeDocument/2006/relationships" xmlns:p="http://schemas.openxmlformats.org/presentationml/2006/main">
+  <p:cSld name="Slide 11">
+    <p:bg>
+      <p:bgPr>
+        <a:solidFill>
           <a:srgbClr val="F5F7FA"/>
         </a:solidFill>
       </p:bgPr>
@@ -4340,7 +5573,7 @@
                 <a:ea typeface="Arial" pitchFamily="34" charset="-122"/>
                 <a:cs typeface="Arial" pitchFamily="34" charset="-120"/>
               </a:rPr>
-              <a:t>10</a:t>
+              <a:t>11</a:t>
             </a:r>
             <a:endParaRPr lang="en-US" sz="900" dirty="0"/>
           </a:p>
@@ -4354,9 +5587,9 @@
 </p:sld>
 </file>
 
-<file path=ppt/slides/slide11.xml><?xml version="1.0" encoding="utf-8"?>
+<file path=ppt/slides/slide12.xml><?xml version="1.0" encoding="utf-8"?>
 <p:sld xmlns:a="http://schemas.openxmlformats.org/drawingml/2006/main" xmlns:r="http://schemas.openxmlformats.org/officeDocument/2006/relationships" xmlns:p="http://schemas.openxmlformats.org/presentationml/2006/main">
-  <p:cSld name="Slide 11">
+  <p:cSld name="Slide 12">
     <p:bg>
       <p:bgPr>
         <a:solidFill>
@@ -5664,7 +6897,7 @@
                 <a:ea typeface="Arial" pitchFamily="34" charset="-122"/>
                 <a:cs typeface="Arial" pitchFamily="34" charset="-120"/>
               </a:rPr>
-              <a:t>11</a:t>
+              <a:t>12</a:t>
             </a:r>
             <a:endParaRPr lang="en-US" sz="900" dirty="0"/>
           </a:p>
@@ -5678,9 +6911,9 @@
 </p:sld>
 </file>
 
-<file path=ppt/slides/slide12.xml><?xml version="1.0" encoding="utf-8"?>
+<file path=ppt/slides/slide13.xml><?xml version="1.0" encoding="utf-8"?>
 <p:sld xmlns:a="http://schemas.openxmlformats.org/drawingml/2006/main" xmlns:r="http://schemas.openxmlformats.org/officeDocument/2006/relationships" xmlns:p="http://schemas.openxmlformats.org/presentationml/2006/main">
-  <p:cSld name="Slide 12">
+  <p:cSld name="Slide 13">
     <p:bg>
       <p:bgPr>
         <a:solidFill>
@@ -7484,7 +8717,7 @@
                 <a:ea typeface="Arial" pitchFamily="34" charset="-122"/>
                 <a:cs typeface="Arial" pitchFamily="34" charset="-120"/>
               </a:rPr>
-              <a:t>12</a:t>
+              <a:t>13</a:t>
             </a:r>
             <a:endParaRPr lang="en-US" sz="900" dirty="0"/>
           </a:p>
@@ -7498,9 +8731,9 @@
 </p:sld>
 </file>
 
-<file path=ppt/slides/slide13.xml><?xml version="1.0" encoding="utf-8"?>
+<file path=ppt/slides/slide14.xml><?xml version="1.0" encoding="utf-8"?>
 <p:sld xmlns:a="http://schemas.openxmlformats.org/drawingml/2006/main" xmlns:r="http://schemas.openxmlformats.org/officeDocument/2006/relationships" xmlns:p="http://schemas.openxmlformats.org/presentationml/2006/main">
-  <p:cSld name="Slide 13">
+  <p:cSld name="Slide 14">
     <p:bg>
       <p:bgPr>
         <a:solidFill>
@@ -8976,7 +10209,7 @@
                 <a:ea typeface="Arial" pitchFamily="34" charset="-122"/>
                 <a:cs typeface="Arial" pitchFamily="34" charset="-120"/>
               </a:rPr>
-              <a:t>13</a:t>
+              <a:t>14</a:t>
             </a:r>
             <a:endParaRPr lang="en-US" sz="900" dirty="0"/>
           </a:p>
@@ -8990,9 +10223,9 @@
 </p:sld>
 </file>
 
-<file path=ppt/slides/slide14.xml><?xml version="1.0" encoding="utf-8"?>
+<file path=ppt/slides/slide15.xml><?xml version="1.0" encoding="utf-8"?>
 <p:sld xmlns:a="http://schemas.openxmlformats.org/drawingml/2006/main" xmlns:r="http://schemas.openxmlformats.org/officeDocument/2006/relationships" xmlns:p="http://schemas.openxmlformats.org/presentationml/2006/main">
-  <p:cSld name="Slide 14">
+  <p:cSld name="Slide 15">
     <p:bg>
       <p:bgPr>
         <a:solidFill>
@@ -11056,7 +12289,7 @@
                 <a:ea typeface="Arial" pitchFamily="34" charset="-122"/>
                 <a:cs typeface="Arial" pitchFamily="34" charset="-120"/>
               </a:rPr>
-              <a:t>14</a:t>
+              <a:t>15</a:t>
             </a:r>
             <a:endParaRPr lang="en-US" sz="900" dirty="0"/>
           </a:p>
@@ -11070,9 +12303,9 @@
 </p:sld>
 </file>
 
-<file path=ppt/slides/slide15.xml><?xml version="1.0" encoding="utf-8"?>
+<file path=ppt/slides/slide16.xml><?xml version="1.0" encoding="utf-8"?>
 <p:sld xmlns:a="http://schemas.openxmlformats.org/drawingml/2006/main" xmlns:r="http://schemas.openxmlformats.org/officeDocument/2006/relationships" xmlns:p="http://schemas.openxmlformats.org/presentationml/2006/main">
-  <p:cSld name="Slide 15">
+  <p:cSld name="Slide 16">
     <p:bg>
       <p:bgPr>
         <a:solidFill>
@@ -13178,7 +14411,7 @@
                 <a:ea typeface="Arial" pitchFamily="34" charset="-122"/>
                 <a:cs typeface="Arial" pitchFamily="34" charset="-120"/>
               </a:rPr>
-              <a:t>15</a:t>
+              <a:t>16</a:t>
             </a:r>
             <a:endParaRPr lang="en-US" sz="900" dirty="0"/>
           </a:p>
@@ -13192,9 +14425,9 @@
 </p:sld>
 </file>
 
-<file path=ppt/slides/slide16.xml><?xml version="1.0" encoding="utf-8"?>
+<file path=ppt/slides/slide17.xml><?xml version="1.0" encoding="utf-8"?>
 <p:sld xmlns:a="http://schemas.openxmlformats.org/drawingml/2006/main" xmlns:r="http://schemas.openxmlformats.org/officeDocument/2006/relationships" xmlns:p="http://schemas.openxmlformats.org/presentationml/2006/main">
-  <p:cSld name="Slide 16">
+  <p:cSld name="Slide 17">
     <p:bg>
       <p:bgPr>
         <a:solidFill>
@@ -15540,9 +16773,9 @@
 </p:sld>
 </file>
 
-<file path=ppt/slides/slide17.xml><?xml version="1.0" encoding="utf-8"?>
+<file path=ppt/slides/slide18.xml><?xml version="1.0" encoding="utf-8"?>
 <p:sld xmlns:a="http://schemas.openxmlformats.org/drawingml/2006/main" xmlns:r="http://schemas.openxmlformats.org/officeDocument/2006/relationships" xmlns:p="http://schemas.openxmlformats.org/presentationml/2006/main">
-  <p:cSld name="Slide 17">
+  <p:cSld name="Slide 18">
     <p:bg>
       <p:bgPr>
         <a:solidFill>
@@ -21213,6 +22446,2601 @@
     <p:bg>
       <p:bgPr>
         <a:solidFill>
+          <a:srgbClr val="F5F7FA"/>
+        </a:solidFill>
+      </p:bgPr>
+    </p:bg>
+    <p:spTree>
+      <p:nvGrpSpPr>
+        <p:cNvPr id="1" name=""/>
+        <p:cNvGrpSpPr/>
+        <p:nvPr/>
+      </p:nvGrpSpPr>
+      <p:grpSpPr>
+        <a:xfrm>
+          <a:off x="0" y="0"/>
+          <a:ext cx="0" cy="0"/>
+          <a:chOff x="0" y="0"/>
+          <a:chExt cx="0" cy="0"/>
+        </a:xfrm>
+      </p:grpSpPr>
+      <p:sp>
+        <p:nvSpPr>
+          <p:cNvPr id="2" name="Shape 0"/>
+          <p:cNvSpPr/>
+          <p:nvPr/>
+        </p:nvSpPr>
+        <p:spPr>
+          <a:xfrm>
+            <a:off x="0" y="0"/>
+            <a:ext cx="164592" cy="6858000"/>
+          </a:xfrm>
+          <a:prstGeom prst="rect">
+            <a:avLst/>
+          </a:prstGeom>
+          <a:solidFill>
+            <a:srgbClr val="2BB0ED"/>
+          </a:solidFill>
+          <a:ln/>
+        </p:spPr>
+      </p:sp>
+      <p:sp>
+        <p:nvSpPr>
+          <p:cNvPr id="3" name="Text 1"/>
+          <p:cNvSpPr/>
+          <p:nvPr/>
+        </p:nvSpPr>
+        <p:spPr>
+          <a:xfrm>
+            <a:off x="502920" y="320040"/>
+            <a:ext cx="10972800" cy="274320"/>
+          </a:xfrm>
+          <a:prstGeom prst="rect">
+            <a:avLst/>
+          </a:prstGeom>
+          <a:noFill/>
+          <a:ln/>
+        </p:spPr>
+        <p:txBody>
+          <a:bodyPr wrap="square" lIns="0" tIns="0" rIns="0" bIns="0" rtlCol="0" anchor="ctr"/>
+          <a:lstStyle/>
+          <a:p>
+            <a:pPr indent="0" marL="0">
+              <a:buNone/>
+            </a:pPr>
+            <a:r>
+              <a:rPr lang="en-US" sz="1100" b="1" spc="400" kern="0" dirty="0">
+                <a:solidFill>
+                  <a:srgbClr val="FF9900"/>
+                </a:solidFill>
+                <a:latin typeface="Arial" pitchFamily="34" charset="0"/>
+                <a:ea typeface="Arial" pitchFamily="34" charset="-122"/>
+                <a:cs typeface="Arial" pitchFamily="34" charset="-120"/>
+              </a:rPr>
+              <a:t>RUNTIME MODEL</a:t>
+            </a:r>
+            <a:endParaRPr lang="en-US" sz="1100" dirty="0"/>
+          </a:p>
+        </p:txBody>
+      </p:sp>
+      <p:sp>
+        <p:nvSpPr>
+          <p:cNvPr id="4" name="Text 2"/>
+          <p:cNvSpPr/>
+          <p:nvPr/>
+        </p:nvSpPr>
+        <p:spPr>
+          <a:xfrm>
+            <a:off x="502920" y="548640"/>
+            <a:ext cx="11247120" cy="731520"/>
+          </a:xfrm>
+          <a:prstGeom prst="rect">
+            <a:avLst/>
+          </a:prstGeom>
+          <a:noFill/>
+          <a:ln/>
+        </p:spPr>
+        <p:txBody>
+          <a:bodyPr wrap="square" lIns="0" tIns="0" rIns="0" bIns="0" rtlCol="0" anchor="ctr"/>
+          <a:lstStyle/>
+          <a:p>
+            <a:pPr indent="0" marL="0">
+              <a:buNone/>
+            </a:pPr>
+            <a:r>
+              <a:rPr lang="en-US" sz="3000" b="1" dirty="0">
+                <a:solidFill>
+                  <a:srgbClr val="0F1F3D"/>
+                </a:solidFill>
+                <a:latin typeface="Georgia" pitchFamily="34" charset="0"/>
+                <a:ea typeface="Georgia" pitchFamily="34" charset="-122"/>
+                <a:cs typeface="Georgia" pitchFamily="34" charset="-120"/>
+              </a:rPr>
+              <a:t>Agents × DAGs — Who Runs What, and When</a:t>
+            </a:r>
+            <a:endParaRPr lang="en-US" sz="3000" dirty="0"/>
+          </a:p>
+        </p:txBody>
+      </p:sp>
+      <p:sp>
+        <p:nvSpPr>
+          <p:cNvPr id="5" name="Text 3"/>
+          <p:cNvSpPr/>
+          <p:nvPr/>
+        </p:nvSpPr>
+        <p:spPr>
+          <a:xfrm>
+            <a:off x="502920" y="1417320"/>
+            <a:ext cx="11155680" cy="365760"/>
+          </a:xfrm>
+          <a:prstGeom prst="rect">
+            <a:avLst/>
+          </a:prstGeom>
+          <a:noFill/>
+          <a:ln/>
+        </p:spPr>
+        <p:txBody>
+          <a:bodyPr wrap="square" lIns="0" tIns="0" rIns="0" bIns="0" rtlCol="0" anchor="ctr"/>
+          <a:lstStyle/>
+          <a:p>
+            <a:pPr indent="0" marL="0">
+              <a:buNone/>
+            </a:pPr>
+            <a:r>
+              <a:rPr lang="en-US" sz="1300" i="1" dirty="0">
+                <a:solidFill>
+                  <a:srgbClr val="3A4A60"/>
+                </a:solidFill>
+              </a:rPr>
+              <a:t>Two graphs. Neither has agent nodes. Agents are stateless workers that process the DAGs.</a:t>
+            </a:r>
+            <a:endParaRPr lang="en-US" sz="1300" dirty="0"/>
+          </a:p>
+        </p:txBody>
+      </p:sp>
+      <p:sp>
+        <p:nvSpPr>
+          <p:cNvPr id="6" name="Shape 4"/>
+          <p:cNvSpPr/>
+          <p:nvPr/>
+        </p:nvSpPr>
+        <p:spPr>
+          <a:xfrm>
+            <a:off x="502920" y="1920240"/>
+            <a:ext cx="5623560" cy="4206240"/>
+          </a:xfrm>
+          <a:prstGeom prst="rect">
+            <a:avLst/>
+          </a:prstGeom>
+          <a:solidFill>
+            <a:srgbClr val="FFFFFF"/>
+          </a:solidFill>
+          <a:ln w="12700">
+            <a:solidFill>
+              <a:srgbClr val="CADCFC"/>
+            </a:solidFill>
+            <a:prstDash val="solid"/>
+          </a:ln>
+        </p:spPr>
+      </p:sp>
+      <p:sp>
+        <p:nvSpPr>
+          <p:cNvPr id="7" name="Shape 5"/>
+          <p:cNvSpPr/>
+          <p:nvPr/>
+        </p:nvSpPr>
+        <p:spPr>
+          <a:xfrm>
+            <a:off x="502920" y="1920240"/>
+            <a:ext cx="5623560" cy="73152"/>
+          </a:xfrm>
+          <a:prstGeom prst="rect">
+            <a:avLst/>
+          </a:prstGeom>
+          <a:solidFill>
+            <a:srgbClr val="2BB0ED"/>
+          </a:solidFill>
+          <a:ln/>
+        </p:spPr>
+      </p:sp>
+      <p:sp>
+        <p:nvSpPr>
+          <p:cNvPr id="8" name="Text 6"/>
+          <p:cNvSpPr/>
+          <p:nvPr/>
+        </p:nvSpPr>
+        <p:spPr>
+          <a:xfrm>
+            <a:off x="685800" y="2103120"/>
+            <a:ext cx="5257800" cy="347472"/>
+          </a:xfrm>
+          <a:prstGeom prst="rect">
+            <a:avLst/>
+          </a:prstGeom>
+          <a:noFill/>
+          <a:ln/>
+        </p:spPr>
+        <p:txBody>
+          <a:bodyPr wrap="square" lIns="0" tIns="0" rIns="0" bIns="0" rtlCol="0" anchor="ctr"/>
+          <a:lstStyle/>
+          <a:p>
+            <a:pPr indent="0" marL="0">
+              <a:buNone/>
+            </a:pPr>
+            <a:r>
+              <a:rPr lang="en-US" sz="1400" b="1" dirty="0">
+                <a:solidFill>
+                  <a:srgbClr val="0F1F3D"/>
+                </a:solidFill>
+              </a:rPr>
+              <a:t>MAF Workflow DAG   (static pipeline)</a:t>
+            </a:r>
+            <a:endParaRPr lang="en-US" sz="1400" dirty="0"/>
+          </a:p>
+        </p:txBody>
+      </p:sp>
+      <p:sp>
+        <p:nvSpPr>
+          <p:cNvPr id="9" name="Text 7"/>
+          <p:cNvSpPr/>
+          <p:nvPr/>
+        </p:nvSpPr>
+        <p:spPr>
+          <a:xfrm>
+            <a:off x="685800" y="2450592"/>
+            <a:ext cx="5257800" cy="640080"/>
+          </a:xfrm>
+          <a:prstGeom prst="rect">
+            <a:avLst/>
+          </a:prstGeom>
+          <a:noFill/>
+          <a:ln/>
+        </p:spPr>
+        <p:txBody>
+          <a:bodyPr wrap="square" lIns="0" tIns="0" rIns="0" bIns="0" rtlCol="0" anchor="ctr"/>
+          <a:lstStyle/>
+          <a:p>
+            <a:pPr indent="0" marL="0">
+              <a:buNone/>
+            </a:pPr>
+            <a:r>
+              <a:rPr lang="en-US" sz="1050" dirty="0">
+                <a:solidFill>
+                  <a:srgbClr val="3A4A60"/>
+                </a:solidFill>
+              </a:rPr>
+              <a:t>Nodes = stages (RepoScanner, Grapher, BRD, Architect, Stories, Scheduler). Hand-authored in Python with `@workflow.node` + declared edges. Same shape every run.</a:t>
+            </a:r>
+            <a:endParaRPr lang="en-US" sz="1050" dirty="0"/>
+          </a:p>
+        </p:txBody>
+      </p:sp>
+      <p:sp>
+        <p:nvSpPr>
+          <p:cNvPr id="10" name="Shape 8"/>
+          <p:cNvSpPr/>
+          <p:nvPr/>
+        </p:nvSpPr>
+        <p:spPr>
+          <a:xfrm>
+            <a:off x="685800" y="3246120"/>
+            <a:ext cx="777240" cy="365760"/>
+          </a:xfrm>
+          <a:prstGeom prst="rect">
+            <a:avLst/>
+          </a:prstGeom>
+          <a:solidFill>
+            <a:srgbClr val="1B3A6B"/>
+          </a:solidFill>
+          <a:ln/>
+        </p:spPr>
+      </p:sp>
+      <p:sp>
+        <p:nvSpPr>
+          <p:cNvPr id="11" name="Text 9"/>
+          <p:cNvSpPr/>
+          <p:nvPr/>
+        </p:nvSpPr>
+        <p:spPr>
+          <a:xfrm>
+            <a:off x="685800" y="3246120"/>
+            <a:ext cx="777240" cy="365760"/>
+          </a:xfrm>
+          <a:prstGeom prst="rect">
+            <a:avLst/>
+          </a:prstGeom>
+          <a:noFill/>
+          <a:ln/>
+        </p:spPr>
+        <p:txBody>
+          <a:bodyPr wrap="square" lIns="0" tIns="0" rIns="0" bIns="0" rtlCol="0" anchor="ctr"/>
+          <a:lstStyle/>
+          <a:p>
+            <a:pPr algn="ctr" indent="0" marL="0">
+              <a:buNone/>
+            </a:pPr>
+            <a:r>
+              <a:rPr lang="en-US" sz="900" b="1" dirty="0">
+                <a:solidFill>
+                  <a:srgbClr val="FFFFFF"/>
+                </a:solidFill>
+              </a:rPr>
+              <a:t>Scanner</a:t>
+            </a:r>
+            <a:endParaRPr lang="en-US" sz="900" dirty="0"/>
+          </a:p>
+        </p:txBody>
+      </p:sp>
+      <p:sp>
+        <p:nvSpPr>
+          <p:cNvPr id="12" name="Text 10"/>
+          <p:cNvSpPr/>
+          <p:nvPr/>
+        </p:nvSpPr>
+        <p:spPr>
+          <a:xfrm>
+            <a:off x="1444752" y="3246120"/>
+            <a:ext cx="137160" cy="365760"/>
+          </a:xfrm>
+          <a:prstGeom prst="rect">
+            <a:avLst/>
+          </a:prstGeom>
+          <a:noFill/>
+          <a:ln/>
+        </p:spPr>
+        <p:txBody>
+          <a:bodyPr wrap="square" lIns="0" tIns="0" rIns="0" bIns="0" rtlCol="0" anchor="ctr"/>
+          <a:lstStyle/>
+          <a:p>
+            <a:pPr algn="ctr" indent="0" marL="0">
+              <a:buNone/>
+            </a:pPr>
+            <a:r>
+              <a:rPr lang="en-US" sz="1100" dirty="0">
+                <a:solidFill>
+                  <a:srgbClr val="2BB0ED"/>
+                </a:solidFill>
+              </a:rPr>
+              <a:t>→</a:t>
+            </a:r>
+            <a:endParaRPr lang="en-US" sz="1100" dirty="0"/>
+          </a:p>
+        </p:txBody>
+      </p:sp>
+      <p:sp>
+        <p:nvSpPr>
+          <p:cNvPr id="13" name="Shape 11"/>
+          <p:cNvSpPr/>
+          <p:nvPr/>
+        </p:nvSpPr>
+        <p:spPr>
+          <a:xfrm>
+            <a:off x="1563624" y="3246120"/>
+            <a:ext cx="777240" cy="365760"/>
+          </a:xfrm>
+          <a:prstGeom prst="rect">
+            <a:avLst/>
+          </a:prstGeom>
+          <a:solidFill>
+            <a:srgbClr val="1B3A6B"/>
+          </a:solidFill>
+          <a:ln/>
+        </p:spPr>
+      </p:sp>
+      <p:sp>
+        <p:nvSpPr>
+          <p:cNvPr id="14" name="Text 12"/>
+          <p:cNvSpPr/>
+          <p:nvPr/>
+        </p:nvSpPr>
+        <p:spPr>
+          <a:xfrm>
+            <a:off x="1563624" y="3246120"/>
+            <a:ext cx="777240" cy="365760"/>
+          </a:xfrm>
+          <a:prstGeom prst="rect">
+            <a:avLst/>
+          </a:prstGeom>
+          <a:noFill/>
+          <a:ln/>
+        </p:spPr>
+        <p:txBody>
+          <a:bodyPr wrap="square" lIns="0" tIns="0" rIns="0" bIns="0" rtlCol="0" anchor="ctr"/>
+          <a:lstStyle/>
+          <a:p>
+            <a:pPr algn="ctr" indent="0" marL="0">
+              <a:buNone/>
+            </a:pPr>
+            <a:r>
+              <a:rPr lang="en-US" sz="900" b="1" dirty="0">
+                <a:solidFill>
+                  <a:srgbClr val="FFFFFF"/>
+                </a:solidFill>
+              </a:rPr>
+              <a:t>Grapher</a:t>
+            </a:r>
+            <a:endParaRPr lang="en-US" sz="900" dirty="0"/>
+          </a:p>
+        </p:txBody>
+      </p:sp>
+      <p:sp>
+        <p:nvSpPr>
+          <p:cNvPr id="15" name="Text 13"/>
+          <p:cNvSpPr/>
+          <p:nvPr/>
+        </p:nvSpPr>
+        <p:spPr>
+          <a:xfrm>
+            <a:off x="2322576" y="3246120"/>
+            <a:ext cx="137160" cy="365760"/>
+          </a:xfrm>
+          <a:prstGeom prst="rect">
+            <a:avLst/>
+          </a:prstGeom>
+          <a:noFill/>
+          <a:ln/>
+        </p:spPr>
+        <p:txBody>
+          <a:bodyPr wrap="square" lIns="0" tIns="0" rIns="0" bIns="0" rtlCol="0" anchor="ctr"/>
+          <a:lstStyle/>
+          <a:p>
+            <a:pPr algn="ctr" indent="0" marL="0">
+              <a:buNone/>
+            </a:pPr>
+            <a:r>
+              <a:rPr lang="en-US" sz="1100" dirty="0">
+                <a:solidFill>
+                  <a:srgbClr val="2BB0ED"/>
+                </a:solidFill>
+              </a:rPr>
+              <a:t>→</a:t>
+            </a:r>
+            <a:endParaRPr lang="en-US" sz="1100" dirty="0"/>
+          </a:p>
+        </p:txBody>
+      </p:sp>
+      <p:sp>
+        <p:nvSpPr>
+          <p:cNvPr id="16" name="Shape 14"/>
+          <p:cNvSpPr/>
+          <p:nvPr/>
+        </p:nvSpPr>
+        <p:spPr>
+          <a:xfrm>
+            <a:off x="2441448" y="3246120"/>
+            <a:ext cx="777240" cy="365760"/>
+          </a:xfrm>
+          <a:prstGeom prst="rect">
+            <a:avLst/>
+          </a:prstGeom>
+          <a:solidFill>
+            <a:srgbClr val="1B3A6B"/>
+          </a:solidFill>
+          <a:ln/>
+        </p:spPr>
+      </p:sp>
+      <p:sp>
+        <p:nvSpPr>
+          <p:cNvPr id="17" name="Text 15"/>
+          <p:cNvSpPr/>
+          <p:nvPr/>
+        </p:nvSpPr>
+        <p:spPr>
+          <a:xfrm>
+            <a:off x="2441448" y="3246120"/>
+            <a:ext cx="777240" cy="365760"/>
+          </a:xfrm>
+          <a:prstGeom prst="rect">
+            <a:avLst/>
+          </a:prstGeom>
+          <a:noFill/>
+          <a:ln/>
+        </p:spPr>
+        <p:txBody>
+          <a:bodyPr wrap="square" lIns="0" tIns="0" rIns="0" bIns="0" rtlCol="0" anchor="ctr"/>
+          <a:lstStyle/>
+          <a:p>
+            <a:pPr algn="ctr" indent="0" marL="0">
+              <a:buNone/>
+            </a:pPr>
+            <a:r>
+              <a:rPr lang="en-US" sz="900" b="1" dirty="0">
+                <a:solidFill>
+                  <a:srgbClr val="FFFFFF"/>
+                </a:solidFill>
+              </a:rPr>
+              <a:t>BRD</a:t>
+            </a:r>
+            <a:endParaRPr lang="en-US" sz="900" dirty="0"/>
+          </a:p>
+        </p:txBody>
+      </p:sp>
+      <p:sp>
+        <p:nvSpPr>
+          <p:cNvPr id="18" name="Text 16"/>
+          <p:cNvSpPr/>
+          <p:nvPr/>
+        </p:nvSpPr>
+        <p:spPr>
+          <a:xfrm>
+            <a:off x="3200400" y="3246120"/>
+            <a:ext cx="137160" cy="365760"/>
+          </a:xfrm>
+          <a:prstGeom prst="rect">
+            <a:avLst/>
+          </a:prstGeom>
+          <a:noFill/>
+          <a:ln/>
+        </p:spPr>
+        <p:txBody>
+          <a:bodyPr wrap="square" lIns="0" tIns="0" rIns="0" bIns="0" rtlCol="0" anchor="ctr"/>
+          <a:lstStyle/>
+          <a:p>
+            <a:pPr algn="ctr" indent="0" marL="0">
+              <a:buNone/>
+            </a:pPr>
+            <a:r>
+              <a:rPr lang="en-US" sz="1100" dirty="0">
+                <a:solidFill>
+                  <a:srgbClr val="2BB0ED"/>
+                </a:solidFill>
+              </a:rPr>
+              <a:t>→</a:t>
+            </a:r>
+            <a:endParaRPr lang="en-US" sz="1100" dirty="0"/>
+          </a:p>
+        </p:txBody>
+      </p:sp>
+      <p:sp>
+        <p:nvSpPr>
+          <p:cNvPr id="19" name="Shape 17"/>
+          <p:cNvSpPr/>
+          <p:nvPr/>
+        </p:nvSpPr>
+        <p:spPr>
+          <a:xfrm>
+            <a:off x="3319272" y="3246120"/>
+            <a:ext cx="777240" cy="365760"/>
+          </a:xfrm>
+          <a:prstGeom prst="rect">
+            <a:avLst/>
+          </a:prstGeom>
+          <a:solidFill>
+            <a:srgbClr val="1B3A6B"/>
+          </a:solidFill>
+          <a:ln/>
+        </p:spPr>
+      </p:sp>
+      <p:sp>
+        <p:nvSpPr>
+          <p:cNvPr id="20" name="Text 18"/>
+          <p:cNvSpPr/>
+          <p:nvPr/>
+        </p:nvSpPr>
+        <p:spPr>
+          <a:xfrm>
+            <a:off x="3319272" y="3246120"/>
+            <a:ext cx="777240" cy="365760"/>
+          </a:xfrm>
+          <a:prstGeom prst="rect">
+            <a:avLst/>
+          </a:prstGeom>
+          <a:noFill/>
+          <a:ln/>
+        </p:spPr>
+        <p:txBody>
+          <a:bodyPr wrap="square" lIns="0" tIns="0" rIns="0" bIns="0" rtlCol="0" anchor="ctr"/>
+          <a:lstStyle/>
+          <a:p>
+            <a:pPr algn="ctr" indent="0" marL="0">
+              <a:buNone/>
+            </a:pPr>
+            <a:r>
+              <a:rPr lang="en-US" sz="900" b="1" dirty="0">
+                <a:solidFill>
+                  <a:srgbClr val="FFFFFF"/>
+                </a:solidFill>
+              </a:rPr>
+              <a:t>Architect</a:t>
+            </a:r>
+            <a:endParaRPr lang="en-US" sz="900" dirty="0"/>
+          </a:p>
+        </p:txBody>
+      </p:sp>
+      <p:sp>
+        <p:nvSpPr>
+          <p:cNvPr id="21" name="Text 19"/>
+          <p:cNvSpPr/>
+          <p:nvPr/>
+        </p:nvSpPr>
+        <p:spPr>
+          <a:xfrm>
+            <a:off x="4078224" y="3246120"/>
+            <a:ext cx="137160" cy="365760"/>
+          </a:xfrm>
+          <a:prstGeom prst="rect">
+            <a:avLst/>
+          </a:prstGeom>
+          <a:noFill/>
+          <a:ln/>
+        </p:spPr>
+        <p:txBody>
+          <a:bodyPr wrap="square" lIns="0" tIns="0" rIns="0" bIns="0" rtlCol="0" anchor="ctr"/>
+          <a:lstStyle/>
+          <a:p>
+            <a:pPr algn="ctr" indent="0" marL="0">
+              <a:buNone/>
+            </a:pPr>
+            <a:r>
+              <a:rPr lang="en-US" sz="1100" dirty="0">
+                <a:solidFill>
+                  <a:srgbClr val="2BB0ED"/>
+                </a:solidFill>
+              </a:rPr>
+              <a:t>→</a:t>
+            </a:r>
+            <a:endParaRPr lang="en-US" sz="1100" dirty="0"/>
+          </a:p>
+        </p:txBody>
+      </p:sp>
+      <p:sp>
+        <p:nvSpPr>
+          <p:cNvPr id="22" name="Shape 20"/>
+          <p:cNvSpPr/>
+          <p:nvPr/>
+        </p:nvSpPr>
+        <p:spPr>
+          <a:xfrm>
+            <a:off x="4197096" y="3246120"/>
+            <a:ext cx="777240" cy="365760"/>
+          </a:xfrm>
+          <a:prstGeom prst="rect">
+            <a:avLst/>
+          </a:prstGeom>
+          <a:solidFill>
+            <a:srgbClr val="1B3A6B"/>
+          </a:solidFill>
+          <a:ln/>
+        </p:spPr>
+      </p:sp>
+      <p:sp>
+        <p:nvSpPr>
+          <p:cNvPr id="23" name="Text 21"/>
+          <p:cNvSpPr/>
+          <p:nvPr/>
+        </p:nvSpPr>
+        <p:spPr>
+          <a:xfrm>
+            <a:off x="4197096" y="3246120"/>
+            <a:ext cx="777240" cy="365760"/>
+          </a:xfrm>
+          <a:prstGeom prst="rect">
+            <a:avLst/>
+          </a:prstGeom>
+          <a:noFill/>
+          <a:ln/>
+        </p:spPr>
+        <p:txBody>
+          <a:bodyPr wrap="square" lIns="0" tIns="0" rIns="0" bIns="0" rtlCol="0" anchor="ctr"/>
+          <a:lstStyle/>
+          <a:p>
+            <a:pPr algn="ctr" indent="0" marL="0">
+              <a:buNone/>
+            </a:pPr>
+            <a:r>
+              <a:rPr lang="en-US" sz="900" b="1" dirty="0">
+                <a:solidFill>
+                  <a:srgbClr val="FFFFFF"/>
+                </a:solidFill>
+              </a:rPr>
+              <a:t>Stories</a:t>
+            </a:r>
+            <a:endParaRPr lang="en-US" sz="900" dirty="0"/>
+          </a:p>
+        </p:txBody>
+      </p:sp>
+      <p:sp>
+        <p:nvSpPr>
+          <p:cNvPr id="24" name="Text 22"/>
+          <p:cNvSpPr/>
+          <p:nvPr/>
+        </p:nvSpPr>
+        <p:spPr>
+          <a:xfrm>
+            <a:off x="4956048" y="3246120"/>
+            <a:ext cx="137160" cy="365760"/>
+          </a:xfrm>
+          <a:prstGeom prst="rect">
+            <a:avLst/>
+          </a:prstGeom>
+          <a:noFill/>
+          <a:ln/>
+        </p:spPr>
+        <p:txBody>
+          <a:bodyPr wrap="square" lIns="0" tIns="0" rIns="0" bIns="0" rtlCol="0" anchor="ctr"/>
+          <a:lstStyle/>
+          <a:p>
+            <a:pPr algn="ctr" indent="0" marL="0">
+              <a:buNone/>
+            </a:pPr>
+            <a:r>
+              <a:rPr lang="en-US" sz="1100" dirty="0">
+                <a:solidFill>
+                  <a:srgbClr val="2BB0ED"/>
+                </a:solidFill>
+              </a:rPr>
+              <a:t>→</a:t>
+            </a:r>
+            <a:endParaRPr lang="en-US" sz="1100" dirty="0"/>
+          </a:p>
+        </p:txBody>
+      </p:sp>
+      <p:sp>
+        <p:nvSpPr>
+          <p:cNvPr id="25" name="Shape 23"/>
+          <p:cNvSpPr/>
+          <p:nvPr/>
+        </p:nvSpPr>
+        <p:spPr>
+          <a:xfrm>
+            <a:off x="5074920" y="3246120"/>
+            <a:ext cx="777240" cy="365760"/>
+          </a:xfrm>
+          <a:prstGeom prst="rect">
+            <a:avLst/>
+          </a:prstGeom>
+          <a:solidFill>
+            <a:srgbClr val="1B3A6B"/>
+          </a:solidFill>
+          <a:ln/>
+        </p:spPr>
+      </p:sp>
+      <p:sp>
+        <p:nvSpPr>
+          <p:cNvPr id="26" name="Text 24"/>
+          <p:cNvSpPr/>
+          <p:nvPr/>
+        </p:nvSpPr>
+        <p:spPr>
+          <a:xfrm>
+            <a:off x="5074920" y="3246120"/>
+            <a:ext cx="777240" cy="365760"/>
+          </a:xfrm>
+          <a:prstGeom prst="rect">
+            <a:avLst/>
+          </a:prstGeom>
+          <a:noFill/>
+          <a:ln/>
+        </p:spPr>
+        <p:txBody>
+          <a:bodyPr wrap="square" lIns="0" tIns="0" rIns="0" bIns="0" rtlCol="0" anchor="ctr"/>
+          <a:lstStyle/>
+          <a:p>
+            <a:pPr algn="ctr" indent="0" marL="0">
+              <a:buNone/>
+            </a:pPr>
+            <a:r>
+              <a:rPr lang="en-US" sz="900" b="1" dirty="0">
+                <a:solidFill>
+                  <a:srgbClr val="FFFFFF"/>
+                </a:solidFill>
+              </a:rPr>
+              <a:t>Sched</a:t>
+            </a:r>
+            <a:endParaRPr lang="en-US" sz="900" dirty="0"/>
+          </a:p>
+        </p:txBody>
+      </p:sp>
+      <p:sp>
+        <p:nvSpPr>
+          <p:cNvPr id="27" name="Shape 25"/>
+          <p:cNvSpPr/>
+          <p:nvPr/>
+        </p:nvSpPr>
+        <p:spPr>
+          <a:xfrm>
+            <a:off x="685800" y="3794760"/>
+            <a:ext cx="1280160" cy="365760"/>
+          </a:xfrm>
+          <a:prstGeom prst="rect">
+            <a:avLst/>
+          </a:prstGeom>
+          <a:solidFill>
+            <a:srgbClr val="EEF2F9"/>
+          </a:solidFill>
+          <a:ln/>
+        </p:spPr>
+      </p:sp>
+      <p:sp>
+        <p:nvSpPr>
+          <p:cNvPr id="28" name="Text 26"/>
+          <p:cNvSpPr/>
+          <p:nvPr/>
+        </p:nvSpPr>
+        <p:spPr>
+          <a:xfrm>
+            <a:off x="731520" y="3794760"/>
+            <a:ext cx="1188720" cy="365760"/>
+          </a:xfrm>
+          <a:prstGeom prst="rect">
+            <a:avLst/>
+          </a:prstGeom>
+          <a:noFill/>
+          <a:ln/>
+        </p:spPr>
+        <p:txBody>
+          <a:bodyPr wrap="square" lIns="0" tIns="0" rIns="0" bIns="0" rtlCol="0" anchor="ctr"/>
+          <a:lstStyle/>
+          <a:p>
+            <a:pPr indent="0" marL="0">
+              <a:buNone/>
+            </a:pPr>
+            <a:r>
+              <a:rPr lang="en-US" sz="1000" b="1" dirty="0">
+                <a:solidFill>
+                  <a:srgbClr val="0F1F3D"/>
+                </a:solidFill>
+              </a:rPr>
+              <a:t>Shape</a:t>
+            </a:r>
+            <a:endParaRPr lang="en-US" sz="1000" dirty="0"/>
+          </a:p>
+        </p:txBody>
+      </p:sp>
+      <p:sp>
+        <p:nvSpPr>
+          <p:cNvPr id="29" name="Text 27"/>
+          <p:cNvSpPr/>
+          <p:nvPr/>
+        </p:nvSpPr>
+        <p:spPr>
+          <a:xfrm>
+            <a:off x="2057400" y="3794760"/>
+            <a:ext cx="3886200" cy="365760"/>
+          </a:xfrm>
+          <a:prstGeom prst="rect">
+            <a:avLst/>
+          </a:prstGeom>
+          <a:noFill/>
+          <a:ln/>
+        </p:spPr>
+        <p:txBody>
+          <a:bodyPr wrap="square" lIns="0" tIns="0" rIns="0" bIns="0" rtlCol="0" anchor="ctr"/>
+          <a:lstStyle/>
+          <a:p>
+            <a:pPr indent="0" marL="0">
+              <a:buNone/>
+            </a:pPr>
+            <a:r>
+              <a:rPr lang="en-US" sz="1000" dirty="0">
+                <a:solidFill>
+                  <a:srgbClr val="3A4A60"/>
+                </a:solidFill>
+              </a:rPr>
+              <a:t>Hand-coded Python; stable across runs.</a:t>
+            </a:r>
+            <a:endParaRPr lang="en-US" sz="1000" dirty="0"/>
+          </a:p>
+        </p:txBody>
+      </p:sp>
+      <p:sp>
+        <p:nvSpPr>
+          <p:cNvPr id="30" name="Shape 28"/>
+          <p:cNvSpPr/>
+          <p:nvPr/>
+        </p:nvSpPr>
+        <p:spPr>
+          <a:xfrm>
+            <a:off x="685800" y="4270248"/>
+            <a:ext cx="1280160" cy="365760"/>
+          </a:xfrm>
+          <a:prstGeom prst="rect">
+            <a:avLst/>
+          </a:prstGeom>
+          <a:solidFill>
+            <a:srgbClr val="EEF2F9"/>
+          </a:solidFill>
+          <a:ln/>
+        </p:spPr>
+      </p:sp>
+      <p:sp>
+        <p:nvSpPr>
+          <p:cNvPr id="31" name="Text 29"/>
+          <p:cNvSpPr/>
+          <p:nvPr/>
+        </p:nvSpPr>
+        <p:spPr>
+          <a:xfrm>
+            <a:off x="731520" y="4270248"/>
+            <a:ext cx="1188720" cy="365760"/>
+          </a:xfrm>
+          <a:prstGeom prst="rect">
+            <a:avLst/>
+          </a:prstGeom>
+          <a:noFill/>
+          <a:ln/>
+        </p:spPr>
+        <p:txBody>
+          <a:bodyPr wrap="square" lIns="0" tIns="0" rIns="0" bIns="0" rtlCol="0" anchor="ctr"/>
+          <a:lstStyle/>
+          <a:p>
+            <a:pPr indent="0" marL="0">
+              <a:buNone/>
+            </a:pPr>
+            <a:r>
+              <a:rPr lang="en-US" sz="1000" b="1" dirty="0">
+                <a:solidFill>
+                  <a:srgbClr val="0F1F3D"/>
+                </a:solidFill>
+              </a:rPr>
+              <a:t>Edges</a:t>
+            </a:r>
+            <a:endParaRPr lang="en-US" sz="1000" dirty="0"/>
+          </a:p>
+        </p:txBody>
+      </p:sp>
+      <p:sp>
+        <p:nvSpPr>
+          <p:cNvPr id="32" name="Text 30"/>
+          <p:cNvSpPr/>
+          <p:nvPr/>
+        </p:nvSpPr>
+        <p:spPr>
+          <a:xfrm>
+            <a:off x="2057400" y="4270248"/>
+            <a:ext cx="3886200" cy="365760"/>
+          </a:xfrm>
+          <a:prstGeom prst="rect">
+            <a:avLst/>
+          </a:prstGeom>
+          <a:noFill/>
+          <a:ln/>
+        </p:spPr>
+        <p:txBody>
+          <a:bodyPr wrap="square" lIns="0" tIns="0" rIns="0" bIns="0" rtlCol="0" anchor="ctr"/>
+          <a:lstStyle/>
+          <a:p>
+            <a:pPr indent="0" marL="0">
+              <a:buNone/>
+            </a:pPr>
+            <a:r>
+              <a:rPr lang="en-US" sz="1000" dirty="0">
+                <a:solidFill>
+                  <a:srgbClr val="3A4A60"/>
+                </a:solidFill>
+              </a:rPr>
+              <a:t>Declared: `Scanner → Grapher → BRD …`</a:t>
+            </a:r>
+            <a:endParaRPr lang="en-US" sz="1000" dirty="0"/>
+          </a:p>
+        </p:txBody>
+      </p:sp>
+      <p:sp>
+        <p:nvSpPr>
+          <p:cNvPr id="33" name="Shape 31"/>
+          <p:cNvSpPr/>
+          <p:nvPr/>
+        </p:nvSpPr>
+        <p:spPr>
+          <a:xfrm>
+            <a:off x="685800" y="4745736"/>
+            <a:ext cx="1280160" cy="365760"/>
+          </a:xfrm>
+          <a:prstGeom prst="rect">
+            <a:avLst/>
+          </a:prstGeom>
+          <a:solidFill>
+            <a:srgbClr val="EEF2F9"/>
+          </a:solidFill>
+          <a:ln/>
+        </p:spPr>
+      </p:sp>
+      <p:sp>
+        <p:nvSpPr>
+          <p:cNvPr id="34" name="Text 32"/>
+          <p:cNvSpPr/>
+          <p:nvPr/>
+        </p:nvSpPr>
+        <p:spPr>
+          <a:xfrm>
+            <a:off x="731520" y="4745736"/>
+            <a:ext cx="1188720" cy="365760"/>
+          </a:xfrm>
+          <a:prstGeom prst="rect">
+            <a:avLst/>
+          </a:prstGeom>
+          <a:noFill/>
+          <a:ln/>
+        </p:spPr>
+        <p:txBody>
+          <a:bodyPr wrap="square" lIns="0" tIns="0" rIns="0" bIns="0" rtlCol="0" anchor="ctr"/>
+          <a:lstStyle/>
+          <a:p>
+            <a:pPr indent="0" marL="0">
+              <a:buNone/>
+            </a:pPr>
+            <a:r>
+              <a:rPr lang="en-US" sz="1000" b="1" dirty="0">
+                <a:solidFill>
+                  <a:srgbClr val="0F1F3D"/>
+                </a:solidFill>
+              </a:rPr>
+              <a:t>Parallelism</a:t>
+            </a:r>
+            <a:endParaRPr lang="en-US" sz="1000" dirty="0"/>
+          </a:p>
+        </p:txBody>
+      </p:sp>
+      <p:sp>
+        <p:nvSpPr>
+          <p:cNvPr id="35" name="Text 33"/>
+          <p:cNvSpPr/>
+          <p:nvPr/>
+        </p:nvSpPr>
+        <p:spPr>
+          <a:xfrm>
+            <a:off x="2057400" y="4745736"/>
+            <a:ext cx="3886200" cy="365760"/>
+          </a:xfrm>
+          <a:prstGeom prst="rect">
+            <a:avLst/>
+          </a:prstGeom>
+          <a:noFill/>
+          <a:ln/>
+        </p:spPr>
+        <p:txBody>
+          <a:bodyPr wrap="square" lIns="0" tIns="0" rIns="0" bIns="0" rtlCol="0" anchor="ctr"/>
+          <a:lstStyle/>
+          <a:p>
+            <a:pPr indent="0" marL="0">
+              <a:buNone/>
+            </a:pPr>
+            <a:r>
+              <a:rPr lang="en-US" sz="1000" dirty="0">
+                <a:solidFill>
+                  <a:srgbClr val="3A4A60"/>
+                </a:solidFill>
+              </a:rPr>
+              <a:t>Fixed — grapher fan-out inside a stage, not across stages.</a:t>
+            </a:r>
+            <a:endParaRPr lang="en-US" sz="1000" dirty="0"/>
+          </a:p>
+        </p:txBody>
+      </p:sp>
+      <p:sp>
+        <p:nvSpPr>
+          <p:cNvPr id="36" name="Shape 34"/>
+          <p:cNvSpPr/>
+          <p:nvPr/>
+        </p:nvSpPr>
+        <p:spPr>
+          <a:xfrm>
+            <a:off x="685800" y="5221224"/>
+            <a:ext cx="1280160" cy="365760"/>
+          </a:xfrm>
+          <a:prstGeom prst="rect">
+            <a:avLst/>
+          </a:prstGeom>
+          <a:solidFill>
+            <a:srgbClr val="EEF2F9"/>
+          </a:solidFill>
+          <a:ln/>
+        </p:spPr>
+      </p:sp>
+      <p:sp>
+        <p:nvSpPr>
+          <p:cNvPr id="37" name="Text 35"/>
+          <p:cNvSpPr/>
+          <p:nvPr/>
+        </p:nvSpPr>
+        <p:spPr>
+          <a:xfrm>
+            <a:off x="731520" y="5221224"/>
+            <a:ext cx="1188720" cy="365760"/>
+          </a:xfrm>
+          <a:prstGeom prst="rect">
+            <a:avLst/>
+          </a:prstGeom>
+          <a:noFill/>
+          <a:ln/>
+        </p:spPr>
+        <p:txBody>
+          <a:bodyPr wrap="square" lIns="0" tIns="0" rIns="0" bIns="0" rtlCol="0" anchor="ctr"/>
+          <a:lstStyle/>
+          <a:p>
+            <a:pPr indent="0" marL="0">
+              <a:buNone/>
+            </a:pPr>
+            <a:r>
+              <a:rPr lang="en-US" sz="1000" b="1" dirty="0">
+                <a:solidFill>
+                  <a:srgbClr val="0F1F3D"/>
+                </a:solidFill>
+              </a:rPr>
+              <a:t>Persistence</a:t>
+            </a:r>
+            <a:endParaRPr lang="en-US" sz="1000" dirty="0"/>
+          </a:p>
+        </p:txBody>
+      </p:sp>
+      <p:sp>
+        <p:nvSpPr>
+          <p:cNvPr id="38" name="Text 36"/>
+          <p:cNvSpPr/>
+          <p:nvPr/>
+        </p:nvSpPr>
+        <p:spPr>
+          <a:xfrm>
+            <a:off x="2057400" y="5221224"/>
+            <a:ext cx="3886200" cy="365760"/>
+          </a:xfrm>
+          <a:prstGeom prst="rect">
+            <a:avLst/>
+          </a:prstGeom>
+          <a:noFill/>
+          <a:ln/>
+        </p:spPr>
+        <p:txBody>
+          <a:bodyPr wrap="square" lIns="0" tIns="0" rIns="0" bIns="0" rtlCol="0" anchor="ctr"/>
+          <a:lstStyle/>
+          <a:p>
+            <a:pPr indent="0" marL="0">
+              <a:buNone/>
+            </a:pPr>
+            <a:r>
+              <a:rPr lang="en-US" sz="1000" dirty="0">
+                <a:solidFill>
+                  <a:srgbClr val="3A4A60"/>
+                </a:solidFill>
+              </a:rPr>
+              <a:t>Artifacts per stage under `discovery/&lt;repo&gt;/`.</a:t>
+            </a:r>
+            <a:endParaRPr lang="en-US" sz="1000" dirty="0"/>
+          </a:p>
+        </p:txBody>
+      </p:sp>
+      <p:sp>
+        <p:nvSpPr>
+          <p:cNvPr id="39" name="Shape 37"/>
+          <p:cNvSpPr/>
+          <p:nvPr/>
+        </p:nvSpPr>
+        <p:spPr>
+          <a:xfrm>
+            <a:off x="685800" y="5696712"/>
+            <a:ext cx="1280160" cy="365760"/>
+          </a:xfrm>
+          <a:prstGeom prst="rect">
+            <a:avLst/>
+          </a:prstGeom>
+          <a:solidFill>
+            <a:srgbClr val="EEF2F9"/>
+          </a:solidFill>
+          <a:ln/>
+        </p:spPr>
+      </p:sp>
+      <p:sp>
+        <p:nvSpPr>
+          <p:cNvPr id="40" name="Text 38"/>
+          <p:cNvSpPr/>
+          <p:nvPr/>
+        </p:nvSpPr>
+        <p:spPr>
+          <a:xfrm>
+            <a:off x="731520" y="5696712"/>
+            <a:ext cx="1188720" cy="365760"/>
+          </a:xfrm>
+          <a:prstGeom prst="rect">
+            <a:avLst/>
+          </a:prstGeom>
+          <a:noFill/>
+          <a:ln/>
+        </p:spPr>
+        <p:txBody>
+          <a:bodyPr wrap="square" lIns="0" tIns="0" rIns="0" bIns="0" rtlCol="0" anchor="ctr"/>
+          <a:lstStyle/>
+          <a:p>
+            <a:pPr indent="0" marL="0">
+              <a:buNone/>
+            </a:pPr>
+            <a:r>
+              <a:rPr lang="en-US" sz="1000" b="1" dirty="0">
+                <a:solidFill>
+                  <a:srgbClr val="0F1F3D"/>
+                </a:solidFill>
+              </a:rPr>
+              <a:t>Failure</a:t>
+            </a:r>
+            <a:endParaRPr lang="en-US" sz="1000" dirty="0"/>
+          </a:p>
+        </p:txBody>
+      </p:sp>
+      <p:sp>
+        <p:nvSpPr>
+          <p:cNvPr id="41" name="Text 39"/>
+          <p:cNvSpPr/>
+          <p:nvPr/>
+        </p:nvSpPr>
+        <p:spPr>
+          <a:xfrm>
+            <a:off x="2057400" y="5696712"/>
+            <a:ext cx="3886200" cy="365760"/>
+          </a:xfrm>
+          <a:prstGeom prst="rect">
+            <a:avLst/>
+          </a:prstGeom>
+          <a:noFill/>
+          <a:ln/>
+        </p:spPr>
+        <p:txBody>
+          <a:bodyPr wrap="square" lIns="0" tIns="0" rIns="0" bIns="0" rtlCol="0" anchor="ctr"/>
+          <a:lstStyle/>
+          <a:p>
+            <a:pPr indent="0" marL="0">
+              <a:buNone/>
+            </a:pPr>
+            <a:r>
+              <a:rPr lang="en-US" sz="1000" dirty="0">
+                <a:solidFill>
+                  <a:srgbClr val="3A4A60"/>
+                </a:solidFill>
+              </a:rPr>
+              <a:t>Critic FAIL → self-heal (≤3) → halt on 3× FAIL.</a:t>
+            </a:r>
+            <a:endParaRPr lang="en-US" sz="1000" dirty="0"/>
+          </a:p>
+        </p:txBody>
+      </p:sp>
+      <p:sp>
+        <p:nvSpPr>
+          <p:cNvPr id="42" name="Shape 40"/>
+          <p:cNvSpPr/>
+          <p:nvPr/>
+        </p:nvSpPr>
+        <p:spPr>
+          <a:xfrm>
+            <a:off x="6263640" y="1920240"/>
+            <a:ext cx="5623560" cy="4206240"/>
+          </a:xfrm>
+          <a:prstGeom prst="rect">
+            <a:avLst/>
+          </a:prstGeom>
+          <a:solidFill>
+            <a:srgbClr val="FFFFFF"/>
+          </a:solidFill>
+          <a:ln w="12700">
+            <a:solidFill>
+              <a:srgbClr val="CADCFC"/>
+            </a:solidFill>
+            <a:prstDash val="solid"/>
+          </a:ln>
+        </p:spPr>
+      </p:sp>
+      <p:sp>
+        <p:nvSpPr>
+          <p:cNvPr id="43" name="Shape 41"/>
+          <p:cNvSpPr/>
+          <p:nvPr/>
+        </p:nvSpPr>
+        <p:spPr>
+          <a:xfrm>
+            <a:off x="6263640" y="1920240"/>
+            <a:ext cx="5623560" cy="73152"/>
+          </a:xfrm>
+          <a:prstGeom prst="rect">
+            <a:avLst/>
+          </a:prstGeom>
+          <a:solidFill>
+            <a:srgbClr val="FF9900"/>
+          </a:solidFill>
+          <a:ln/>
+        </p:spPr>
+      </p:sp>
+      <p:sp>
+        <p:nvSpPr>
+          <p:cNvPr id="44" name="Text 42"/>
+          <p:cNvSpPr/>
+          <p:nvPr/>
+        </p:nvSpPr>
+        <p:spPr>
+          <a:xfrm>
+            <a:off x="6446520" y="2103120"/>
+            <a:ext cx="5257800" cy="347472"/>
+          </a:xfrm>
+          <a:prstGeom prst="rect">
+            <a:avLst/>
+          </a:prstGeom>
+          <a:noFill/>
+          <a:ln/>
+        </p:spPr>
+        <p:txBody>
+          <a:bodyPr wrap="square" lIns="0" tIns="0" rIns="0" bIns="0" rtlCol="0" anchor="ctr"/>
+          <a:lstStyle/>
+          <a:p>
+            <a:pPr indent="0" marL="0">
+              <a:buNone/>
+            </a:pPr>
+            <a:r>
+              <a:rPr lang="en-US" sz="1400" b="1" dirty="0">
+                <a:solidFill>
+                  <a:srgbClr val="0F1F3D"/>
+                </a:solidFill>
+              </a:rPr>
+              <a:t>Wave DAG   (built at runtime by wave_scheduler.py)</a:t>
+            </a:r>
+            <a:endParaRPr lang="en-US" sz="1400" dirty="0"/>
+          </a:p>
+        </p:txBody>
+      </p:sp>
+      <p:sp>
+        <p:nvSpPr>
+          <p:cNvPr id="45" name="Text 43"/>
+          <p:cNvSpPr/>
+          <p:nvPr/>
+        </p:nvSpPr>
+        <p:spPr>
+          <a:xfrm>
+            <a:off x="6446520" y="2450592"/>
+            <a:ext cx="5257800" cy="640080"/>
+          </a:xfrm>
+          <a:prstGeom prst="rect">
+            <a:avLst/>
+          </a:prstGeom>
+          <a:noFill/>
+          <a:ln/>
+        </p:spPr>
+        <p:txBody>
+          <a:bodyPr wrap="square" lIns="0" tIns="0" rIns="0" bIns="0" rtlCol="0" anchor="ctr"/>
+          <a:lstStyle/>
+          <a:p>
+            <a:pPr indent="0" marL="0">
+              <a:buNone/>
+            </a:pPr>
+            <a:r>
+              <a:rPr lang="en-US" sz="1050" dirty="0">
+                <a:solidFill>
+                  <a:srgbClr val="3A4A60"/>
+                </a:solidFill>
+              </a:rPr>
+              <a:t>Nodes = modules only. Topologically sorted by cross-module imports → ordered waves. This is what `[progress] ▶ wave N` refers to in run logs.</a:t>
+            </a:r>
+            <a:endParaRPr lang="en-US" sz="1050" dirty="0"/>
+          </a:p>
+        </p:txBody>
+      </p:sp>
+      <p:sp>
+        <p:nvSpPr>
+          <p:cNvPr id="46" name="Shape 44"/>
+          <p:cNvSpPr/>
+          <p:nvPr/>
+        </p:nvSpPr>
+        <p:spPr>
+          <a:xfrm>
+            <a:off x="6446520" y="3246120"/>
+            <a:ext cx="1234440" cy="1005840"/>
+          </a:xfrm>
+          <a:prstGeom prst="rect">
+            <a:avLst/>
+          </a:prstGeom>
+          <a:solidFill>
+            <a:srgbClr val="EEF2F9"/>
+          </a:solidFill>
+          <a:ln w="9525">
+            <a:solidFill>
+              <a:srgbClr val="FF9900"/>
+            </a:solidFill>
+            <a:prstDash val="solid"/>
+          </a:ln>
+        </p:spPr>
+      </p:sp>
+      <p:sp>
+        <p:nvSpPr>
+          <p:cNvPr id="47" name="Text 45"/>
+          <p:cNvSpPr/>
+          <p:nvPr/>
+        </p:nvSpPr>
+        <p:spPr>
+          <a:xfrm>
+            <a:off x="6446520" y="3264408"/>
+            <a:ext cx="1234440" cy="274320"/>
+          </a:xfrm>
+          <a:prstGeom prst="rect">
+            <a:avLst/>
+          </a:prstGeom>
+          <a:noFill/>
+          <a:ln/>
+        </p:spPr>
+        <p:txBody>
+          <a:bodyPr wrap="square" lIns="0" tIns="0" rIns="0" bIns="0" rtlCol="0" anchor="ctr"/>
+          <a:lstStyle/>
+          <a:p>
+            <a:pPr algn="ctr" indent="0" marL="0">
+              <a:buNone/>
+            </a:pPr>
+            <a:r>
+              <a:rPr lang="en-US" sz="1000" b="1" dirty="0">
+                <a:solidFill>
+                  <a:srgbClr val="FF9900"/>
+                </a:solidFill>
+              </a:rPr>
+              <a:t>W1</a:t>
+            </a:r>
+            <a:endParaRPr lang="en-US" sz="1000" dirty="0"/>
+          </a:p>
+        </p:txBody>
+      </p:sp>
+      <p:sp>
+        <p:nvSpPr>
+          <p:cNvPr id="48" name="Text 46"/>
+          <p:cNvSpPr/>
+          <p:nvPr/>
+        </p:nvSpPr>
+        <p:spPr>
+          <a:xfrm>
+            <a:off x="6492240" y="3538728"/>
+            <a:ext cx="1143000" cy="256032"/>
+          </a:xfrm>
+          <a:prstGeom prst="rect">
+            <a:avLst/>
+          </a:prstGeom>
+          <a:noFill/>
+          <a:ln/>
+        </p:spPr>
+        <p:txBody>
+          <a:bodyPr wrap="square" lIns="0" tIns="0" rIns="0" bIns="0" rtlCol="0" anchor="ctr"/>
+          <a:lstStyle/>
+          <a:p>
+            <a:pPr algn="ctr" indent="0" marL="0">
+              <a:buNone/>
+            </a:pPr>
+            <a:r>
+              <a:rPr lang="en-US" sz="900" dirty="0">
+                <a:solidFill>
+                  <a:srgbClr val="0F1F3D"/>
+                </a:solidFill>
+                <a:latin typeface="Consolas" pitchFamily="34" charset="0"/>
+                <a:ea typeface="Consolas" pitchFamily="34" charset="-122"/>
+                <a:cs typeface="Consolas" pitchFamily="34" charset="-120"/>
+              </a:rPr>
+              <a:t>transformer</a:t>
+            </a:r>
+            <a:endParaRPr lang="en-US" sz="900" dirty="0"/>
+          </a:p>
+        </p:txBody>
+      </p:sp>
+      <p:sp>
+        <p:nvSpPr>
+          <p:cNvPr id="49" name="Text 47"/>
+          <p:cNvSpPr/>
+          <p:nvPr/>
+        </p:nvSpPr>
+        <p:spPr>
+          <a:xfrm>
+            <a:off x="6492240" y="3831336"/>
+            <a:ext cx="1143000" cy="256032"/>
+          </a:xfrm>
+          <a:prstGeom prst="rect">
+            <a:avLst/>
+          </a:prstGeom>
+          <a:noFill/>
+          <a:ln/>
+        </p:spPr>
+        <p:txBody>
+          <a:bodyPr wrap="square" lIns="0" tIns="0" rIns="0" bIns="0" rtlCol="0" anchor="ctr"/>
+          <a:lstStyle/>
+          <a:p>
+            <a:pPr algn="ctr" indent="0" marL="0">
+              <a:buNone/>
+            </a:pPr>
+            <a:r>
+              <a:rPr lang="en-US" sz="900" dirty="0">
+                <a:solidFill>
+                  <a:srgbClr val="0F1F3D"/>
+                </a:solidFill>
+                <a:latin typeface="Consolas" pitchFamily="34" charset="0"/>
+                <a:ea typeface="Consolas" pitchFamily="34" charset="-122"/>
+                <a:cs typeface="Consolas" pitchFamily="34" charset="-120"/>
+              </a:rPr>
+              <a:t>validator</a:t>
+            </a:r>
+            <a:endParaRPr lang="en-US" sz="900" dirty="0"/>
+          </a:p>
+        </p:txBody>
+      </p:sp>
+      <p:sp>
+        <p:nvSpPr>
+          <p:cNvPr id="50" name="Text 48"/>
+          <p:cNvSpPr/>
+          <p:nvPr/>
+        </p:nvSpPr>
+        <p:spPr>
+          <a:xfrm>
+            <a:off x="7635240" y="3611880"/>
+            <a:ext cx="182880" cy="274320"/>
+          </a:xfrm>
+          <a:prstGeom prst="rect">
+            <a:avLst/>
+          </a:prstGeom>
+          <a:noFill/>
+          <a:ln/>
+        </p:spPr>
+        <p:txBody>
+          <a:bodyPr wrap="square" lIns="0" tIns="0" rIns="0" bIns="0" rtlCol="0" anchor="ctr"/>
+          <a:lstStyle/>
+          <a:p>
+            <a:pPr algn="ctr" indent="0" marL="0">
+              <a:buNone/>
+            </a:pPr>
+            <a:r>
+              <a:rPr lang="en-US" sz="1100" dirty="0">
+                <a:solidFill>
+                  <a:srgbClr val="FF9900"/>
+                </a:solidFill>
+              </a:rPr>
+              <a:t>→</a:t>
+            </a:r>
+            <a:endParaRPr lang="en-US" sz="1100" dirty="0"/>
+          </a:p>
+        </p:txBody>
+      </p:sp>
+      <p:sp>
+        <p:nvSpPr>
+          <p:cNvPr id="51" name="Shape 49"/>
+          <p:cNvSpPr/>
+          <p:nvPr/>
+        </p:nvSpPr>
+        <p:spPr>
+          <a:xfrm>
+            <a:off x="7772400" y="3246120"/>
+            <a:ext cx="1234440" cy="1005840"/>
+          </a:xfrm>
+          <a:prstGeom prst="rect">
+            <a:avLst/>
+          </a:prstGeom>
+          <a:solidFill>
+            <a:srgbClr val="EEF2F9"/>
+          </a:solidFill>
+          <a:ln w="9525">
+            <a:solidFill>
+              <a:srgbClr val="FF9900"/>
+            </a:solidFill>
+            <a:prstDash val="solid"/>
+          </a:ln>
+        </p:spPr>
+      </p:sp>
+      <p:sp>
+        <p:nvSpPr>
+          <p:cNvPr id="52" name="Text 50"/>
+          <p:cNvSpPr/>
+          <p:nvPr/>
+        </p:nvSpPr>
+        <p:spPr>
+          <a:xfrm>
+            <a:off x="7772400" y="3264408"/>
+            <a:ext cx="1234440" cy="274320"/>
+          </a:xfrm>
+          <a:prstGeom prst="rect">
+            <a:avLst/>
+          </a:prstGeom>
+          <a:noFill/>
+          <a:ln/>
+        </p:spPr>
+        <p:txBody>
+          <a:bodyPr wrap="square" lIns="0" tIns="0" rIns="0" bIns="0" rtlCol="0" anchor="ctr"/>
+          <a:lstStyle/>
+          <a:p>
+            <a:pPr algn="ctr" indent="0" marL="0">
+              <a:buNone/>
+            </a:pPr>
+            <a:r>
+              <a:rPr lang="en-US" sz="1000" b="1" dirty="0">
+                <a:solidFill>
+                  <a:srgbClr val="FF9900"/>
+                </a:solidFill>
+              </a:rPr>
+              <a:t>W2</a:t>
+            </a:r>
+            <a:endParaRPr lang="en-US" sz="1000" dirty="0"/>
+          </a:p>
+        </p:txBody>
+      </p:sp>
+      <p:sp>
+        <p:nvSpPr>
+          <p:cNvPr id="53" name="Text 51"/>
+          <p:cNvSpPr/>
+          <p:nvPr/>
+        </p:nvSpPr>
+        <p:spPr>
+          <a:xfrm>
+            <a:off x="7818120" y="3538728"/>
+            <a:ext cx="1143000" cy="256032"/>
+          </a:xfrm>
+          <a:prstGeom prst="rect">
+            <a:avLst/>
+          </a:prstGeom>
+          <a:noFill/>
+          <a:ln/>
+        </p:spPr>
+        <p:txBody>
+          <a:bodyPr wrap="square" lIns="0" tIns="0" rIns="0" bIns="0" rtlCol="0" anchor="ctr"/>
+          <a:lstStyle/>
+          <a:p>
+            <a:pPr algn="ctr" indent="0" marL="0">
+              <a:buNone/>
+            </a:pPr>
+            <a:r>
+              <a:rPr lang="en-US" sz="900" dirty="0">
+                <a:solidFill>
+                  <a:srgbClr val="0F1F3D"/>
+                </a:solidFill>
+                <a:latin typeface="Consolas" pitchFamily="34" charset="0"/>
+                <a:ea typeface="Consolas" pitchFamily="34" charset="-122"/>
+                <a:cs typeface="Consolas" pitchFamily="34" charset="-120"/>
+              </a:rPr>
+              <a:t>dynamo_repo</a:t>
+            </a:r>
+            <a:endParaRPr lang="en-US" sz="900" dirty="0"/>
+          </a:p>
+        </p:txBody>
+      </p:sp>
+      <p:sp>
+        <p:nvSpPr>
+          <p:cNvPr id="54" name="Text 52"/>
+          <p:cNvSpPr/>
+          <p:nvPr/>
+        </p:nvSpPr>
+        <p:spPr>
+          <a:xfrm>
+            <a:off x="7818120" y="3831336"/>
+            <a:ext cx="1143000" cy="256032"/>
+          </a:xfrm>
+          <a:prstGeom prst="rect">
+            <a:avLst/>
+          </a:prstGeom>
+          <a:noFill/>
+          <a:ln/>
+        </p:spPr>
+        <p:txBody>
+          <a:bodyPr wrap="square" lIns="0" tIns="0" rIns="0" bIns="0" rtlCol="0" anchor="ctr"/>
+          <a:lstStyle/>
+          <a:p>
+            <a:pPr algn="ctr" indent="0" marL="0">
+              <a:buNone/>
+            </a:pPr>
+            <a:r>
+              <a:rPr lang="en-US" sz="900" dirty="0">
+                <a:solidFill>
+                  <a:srgbClr val="0F1F3D"/>
+                </a:solidFill>
+                <a:latin typeface="Consolas" pitchFamily="34" charset="0"/>
+                <a:ea typeface="Consolas" pitchFamily="34" charset="-122"/>
+                <a:cs typeface="Consolas" pitchFamily="34" charset="-120"/>
+              </a:rPr>
+              <a:t>blob_repo</a:t>
+            </a:r>
+            <a:endParaRPr lang="en-US" sz="900" dirty="0"/>
+          </a:p>
+        </p:txBody>
+      </p:sp>
+      <p:sp>
+        <p:nvSpPr>
+          <p:cNvPr id="55" name="Text 53"/>
+          <p:cNvSpPr/>
+          <p:nvPr/>
+        </p:nvSpPr>
+        <p:spPr>
+          <a:xfrm>
+            <a:off x="8961120" y="3611880"/>
+            <a:ext cx="182880" cy="274320"/>
+          </a:xfrm>
+          <a:prstGeom prst="rect">
+            <a:avLst/>
+          </a:prstGeom>
+          <a:noFill/>
+          <a:ln/>
+        </p:spPr>
+        <p:txBody>
+          <a:bodyPr wrap="square" lIns="0" tIns="0" rIns="0" bIns="0" rtlCol="0" anchor="ctr"/>
+          <a:lstStyle/>
+          <a:p>
+            <a:pPr algn="ctr" indent="0" marL="0">
+              <a:buNone/>
+            </a:pPr>
+            <a:r>
+              <a:rPr lang="en-US" sz="1100" dirty="0">
+                <a:solidFill>
+                  <a:srgbClr val="FF9900"/>
+                </a:solidFill>
+              </a:rPr>
+              <a:t>→</a:t>
+            </a:r>
+            <a:endParaRPr lang="en-US" sz="1100" dirty="0"/>
+          </a:p>
+        </p:txBody>
+      </p:sp>
+      <p:sp>
+        <p:nvSpPr>
+          <p:cNvPr id="56" name="Shape 54"/>
+          <p:cNvSpPr/>
+          <p:nvPr/>
+        </p:nvSpPr>
+        <p:spPr>
+          <a:xfrm>
+            <a:off x="9098280" y="3246120"/>
+            <a:ext cx="1234440" cy="1005840"/>
+          </a:xfrm>
+          <a:prstGeom prst="rect">
+            <a:avLst/>
+          </a:prstGeom>
+          <a:solidFill>
+            <a:srgbClr val="EEF2F9"/>
+          </a:solidFill>
+          <a:ln w="9525">
+            <a:solidFill>
+              <a:srgbClr val="FF9900"/>
+            </a:solidFill>
+            <a:prstDash val="solid"/>
+          </a:ln>
+        </p:spPr>
+      </p:sp>
+      <p:sp>
+        <p:nvSpPr>
+          <p:cNvPr id="57" name="Text 55"/>
+          <p:cNvSpPr/>
+          <p:nvPr/>
+        </p:nvSpPr>
+        <p:spPr>
+          <a:xfrm>
+            <a:off x="9098280" y="3264408"/>
+            <a:ext cx="1234440" cy="274320"/>
+          </a:xfrm>
+          <a:prstGeom prst="rect">
+            <a:avLst/>
+          </a:prstGeom>
+          <a:noFill/>
+          <a:ln/>
+        </p:spPr>
+        <p:txBody>
+          <a:bodyPr wrap="square" lIns="0" tIns="0" rIns="0" bIns="0" rtlCol="0" anchor="ctr"/>
+          <a:lstStyle/>
+          <a:p>
+            <a:pPr algn="ctr" indent="0" marL="0">
+              <a:buNone/>
+            </a:pPr>
+            <a:r>
+              <a:rPr lang="en-US" sz="1000" b="1" dirty="0">
+                <a:solidFill>
+                  <a:srgbClr val="FF9900"/>
+                </a:solidFill>
+              </a:rPr>
+              <a:t>W3</a:t>
+            </a:r>
+            <a:endParaRPr lang="en-US" sz="1000" dirty="0"/>
+          </a:p>
+        </p:txBody>
+      </p:sp>
+      <p:sp>
+        <p:nvSpPr>
+          <p:cNvPr id="58" name="Text 56"/>
+          <p:cNvSpPr/>
+          <p:nvPr/>
+        </p:nvSpPr>
+        <p:spPr>
+          <a:xfrm>
+            <a:off x="9144000" y="3538728"/>
+            <a:ext cx="1143000" cy="256032"/>
+          </a:xfrm>
+          <a:prstGeom prst="rect">
+            <a:avLst/>
+          </a:prstGeom>
+          <a:noFill/>
+          <a:ln/>
+        </p:spPr>
+        <p:txBody>
+          <a:bodyPr wrap="square" lIns="0" tIns="0" rIns="0" bIns="0" rtlCol="0" anchor="ctr"/>
+          <a:lstStyle/>
+          <a:p>
+            <a:pPr algn="ctr" indent="0" marL="0">
+              <a:buNone/>
+            </a:pPr>
+            <a:r>
+              <a:rPr lang="en-US" sz="900" dirty="0">
+                <a:solidFill>
+                  <a:srgbClr val="0F1F3D"/>
+                </a:solidFill>
+                <a:latin typeface="Consolas" pitchFamily="34" charset="0"/>
+                <a:ea typeface="Consolas" pitchFamily="34" charset="-122"/>
+                <a:cs typeface="Consolas" pitchFamily="34" charset="-120"/>
+              </a:rPr>
+              <a:t>filing_q</a:t>
+            </a:r>
+            <a:endParaRPr lang="en-US" sz="900" dirty="0"/>
+          </a:p>
+        </p:txBody>
+      </p:sp>
+      <p:sp>
+        <p:nvSpPr>
+          <p:cNvPr id="59" name="Text 57"/>
+          <p:cNvSpPr/>
+          <p:nvPr/>
+        </p:nvSpPr>
+        <p:spPr>
+          <a:xfrm>
+            <a:off x="9144000" y="3831336"/>
+            <a:ext cx="1143000" cy="256032"/>
+          </a:xfrm>
+          <a:prstGeom prst="rect">
+            <a:avLst/>
+          </a:prstGeom>
+          <a:noFill/>
+          <a:ln/>
+        </p:spPr>
+        <p:txBody>
+          <a:bodyPr wrap="square" lIns="0" tIns="0" rIns="0" bIns="0" rtlCol="0" anchor="ctr"/>
+          <a:lstStyle/>
+          <a:p>
+            <a:pPr algn="ctr" indent="0" marL="0">
+              <a:buNone/>
+            </a:pPr>
+            <a:r>
+              <a:rPr lang="en-US" sz="900" dirty="0">
+                <a:solidFill>
+                  <a:srgbClr val="0F1F3D"/>
+                </a:solidFill>
+                <a:latin typeface="Consolas" pitchFamily="34" charset="0"/>
+                <a:ea typeface="Consolas" pitchFamily="34" charset="-122"/>
+                <a:cs typeface="Consolas" pitchFamily="34" charset="-120"/>
+              </a:rPr>
+              <a:t>bot_resp</a:t>
+            </a:r>
+            <a:endParaRPr lang="en-US" sz="900" dirty="0"/>
+          </a:p>
+        </p:txBody>
+      </p:sp>
+      <p:sp>
+        <p:nvSpPr>
+          <p:cNvPr id="60" name="Text 58"/>
+          <p:cNvSpPr/>
+          <p:nvPr/>
+        </p:nvSpPr>
+        <p:spPr>
+          <a:xfrm>
+            <a:off x="10287000" y="3611880"/>
+            <a:ext cx="182880" cy="274320"/>
+          </a:xfrm>
+          <a:prstGeom prst="rect">
+            <a:avLst/>
+          </a:prstGeom>
+          <a:noFill/>
+          <a:ln/>
+        </p:spPr>
+        <p:txBody>
+          <a:bodyPr wrap="square" lIns="0" tIns="0" rIns="0" bIns="0" rtlCol="0" anchor="ctr"/>
+          <a:lstStyle/>
+          <a:p>
+            <a:pPr algn="ctr" indent="0" marL="0">
+              <a:buNone/>
+            </a:pPr>
+            <a:r>
+              <a:rPr lang="en-US" sz="1100" dirty="0">
+                <a:solidFill>
+                  <a:srgbClr val="FF9900"/>
+                </a:solidFill>
+              </a:rPr>
+              <a:t>→</a:t>
+            </a:r>
+            <a:endParaRPr lang="en-US" sz="1100" dirty="0"/>
+          </a:p>
+        </p:txBody>
+      </p:sp>
+      <p:sp>
+        <p:nvSpPr>
+          <p:cNvPr id="61" name="Shape 59"/>
+          <p:cNvSpPr/>
+          <p:nvPr/>
+        </p:nvSpPr>
+        <p:spPr>
+          <a:xfrm>
+            <a:off x="10424160" y="3246120"/>
+            <a:ext cx="1234440" cy="1005840"/>
+          </a:xfrm>
+          <a:prstGeom prst="rect">
+            <a:avLst/>
+          </a:prstGeom>
+          <a:solidFill>
+            <a:srgbClr val="EEF2F9"/>
+          </a:solidFill>
+          <a:ln w="9525">
+            <a:solidFill>
+              <a:srgbClr val="FF9900"/>
+            </a:solidFill>
+            <a:prstDash val="solid"/>
+          </a:ln>
+        </p:spPr>
+      </p:sp>
+      <p:sp>
+        <p:nvSpPr>
+          <p:cNvPr id="62" name="Text 60"/>
+          <p:cNvSpPr/>
+          <p:nvPr/>
+        </p:nvSpPr>
+        <p:spPr>
+          <a:xfrm>
+            <a:off x="10424160" y="3264408"/>
+            <a:ext cx="1234440" cy="274320"/>
+          </a:xfrm>
+          <a:prstGeom prst="rect">
+            <a:avLst/>
+          </a:prstGeom>
+          <a:noFill/>
+          <a:ln/>
+        </p:spPr>
+        <p:txBody>
+          <a:bodyPr wrap="square" lIns="0" tIns="0" rIns="0" bIns="0" rtlCol="0" anchor="ctr"/>
+          <a:lstStyle/>
+          <a:p>
+            <a:pPr algn="ctr" indent="0" marL="0">
+              <a:buNone/>
+            </a:pPr>
+            <a:r>
+              <a:rPr lang="en-US" sz="1000" b="1" dirty="0">
+                <a:solidFill>
+                  <a:srgbClr val="FF9900"/>
+                </a:solidFill>
+              </a:rPr>
+              <a:t>W4</a:t>
+            </a:r>
+            <a:endParaRPr lang="en-US" sz="1000" dirty="0"/>
+          </a:p>
+        </p:txBody>
+      </p:sp>
+      <p:sp>
+        <p:nvSpPr>
+          <p:cNvPr id="63" name="Text 61"/>
+          <p:cNvSpPr/>
+          <p:nvPr/>
+        </p:nvSpPr>
+        <p:spPr>
+          <a:xfrm>
+            <a:off x="10469880" y="3538728"/>
+            <a:ext cx="1143000" cy="256032"/>
+          </a:xfrm>
+          <a:prstGeom prst="rect">
+            <a:avLst/>
+          </a:prstGeom>
+          <a:noFill/>
+          <a:ln/>
+        </p:spPr>
+        <p:txBody>
+          <a:bodyPr wrap="square" lIns="0" tIns="0" rIns="0" bIns="0" rtlCol="0" anchor="ctr"/>
+          <a:lstStyle/>
+          <a:p>
+            <a:pPr algn="ctr" indent="0" marL="0">
+              <a:buNone/>
+            </a:pPr>
+            <a:r>
+              <a:rPr lang="en-US" sz="900" dirty="0">
+                <a:solidFill>
+                  <a:srgbClr val="0F1F3D"/>
+                </a:solidFill>
+                <a:latin typeface="Consolas" pitchFamily="34" charset="0"/>
+                <a:ea typeface="Consolas" pitchFamily="34" charset="-122"/>
+                <a:cs typeface="Consolas" pitchFamily="34" charset="-120"/>
+              </a:rPr>
+              <a:t>orchestrator</a:t>
+            </a:r>
+            <a:endParaRPr lang="en-US" sz="900" dirty="0"/>
+          </a:p>
+        </p:txBody>
+      </p:sp>
+      <p:sp>
+        <p:nvSpPr>
+          <p:cNvPr id="64" name="Shape 62"/>
+          <p:cNvSpPr/>
+          <p:nvPr/>
+        </p:nvSpPr>
+        <p:spPr>
+          <a:xfrm>
+            <a:off x="6446520" y="4389120"/>
+            <a:ext cx="1280160" cy="292608"/>
+          </a:xfrm>
+          <a:prstGeom prst="rect">
+            <a:avLst/>
+          </a:prstGeom>
+          <a:solidFill>
+            <a:srgbClr val="EEF2F9"/>
+          </a:solidFill>
+          <a:ln/>
+        </p:spPr>
+      </p:sp>
+      <p:sp>
+        <p:nvSpPr>
+          <p:cNvPr id="65" name="Text 63"/>
+          <p:cNvSpPr/>
+          <p:nvPr/>
+        </p:nvSpPr>
+        <p:spPr>
+          <a:xfrm>
+            <a:off x="6492240" y="4389120"/>
+            <a:ext cx="1188720" cy="292608"/>
+          </a:xfrm>
+          <a:prstGeom prst="rect">
+            <a:avLst/>
+          </a:prstGeom>
+          <a:noFill/>
+          <a:ln/>
+        </p:spPr>
+        <p:txBody>
+          <a:bodyPr wrap="square" lIns="0" tIns="0" rIns="0" bIns="0" rtlCol="0" anchor="ctr"/>
+          <a:lstStyle/>
+          <a:p>
+            <a:pPr indent="0" marL="0">
+              <a:buNone/>
+            </a:pPr>
+            <a:r>
+              <a:rPr lang="en-US" sz="950" b="1" dirty="0">
+                <a:solidFill>
+                  <a:srgbClr val="0F1F3D"/>
+                </a:solidFill>
+              </a:rPr>
+              <a:t>Shape</a:t>
+            </a:r>
+            <a:endParaRPr lang="en-US" sz="950" dirty="0"/>
+          </a:p>
+        </p:txBody>
+      </p:sp>
+      <p:sp>
+        <p:nvSpPr>
+          <p:cNvPr id="66" name="Text 64"/>
+          <p:cNvSpPr/>
+          <p:nvPr/>
+        </p:nvSpPr>
+        <p:spPr>
+          <a:xfrm>
+            <a:off x="7818120" y="4389120"/>
+            <a:ext cx="3886200" cy="292608"/>
+          </a:xfrm>
+          <a:prstGeom prst="rect">
+            <a:avLst/>
+          </a:prstGeom>
+          <a:noFill/>
+          <a:ln/>
+        </p:spPr>
+        <p:txBody>
+          <a:bodyPr wrap="square" lIns="0" tIns="0" rIns="0" bIns="0" rtlCol="0" anchor="ctr"/>
+          <a:lstStyle/>
+          <a:p>
+            <a:pPr indent="0" marL="0">
+              <a:buNone/>
+            </a:pPr>
+            <a:r>
+              <a:rPr lang="en-US" sz="950" dirty="0">
+                <a:solidFill>
+                  <a:srgbClr val="3A4A60"/>
+                </a:solidFill>
+              </a:rPr>
+              <a:t>Built per run from graph.json edges.</a:t>
+            </a:r>
+            <a:endParaRPr lang="en-US" sz="950" dirty="0"/>
+          </a:p>
+        </p:txBody>
+      </p:sp>
+      <p:sp>
+        <p:nvSpPr>
+          <p:cNvPr id="67" name="Shape 65"/>
+          <p:cNvSpPr/>
+          <p:nvPr/>
+        </p:nvSpPr>
+        <p:spPr>
+          <a:xfrm>
+            <a:off x="6446520" y="4736592"/>
+            <a:ext cx="1280160" cy="292608"/>
+          </a:xfrm>
+          <a:prstGeom prst="rect">
+            <a:avLst/>
+          </a:prstGeom>
+          <a:solidFill>
+            <a:srgbClr val="EEF2F9"/>
+          </a:solidFill>
+          <a:ln/>
+        </p:spPr>
+      </p:sp>
+      <p:sp>
+        <p:nvSpPr>
+          <p:cNvPr id="68" name="Text 66"/>
+          <p:cNvSpPr/>
+          <p:nvPr/>
+        </p:nvSpPr>
+        <p:spPr>
+          <a:xfrm>
+            <a:off x="6492240" y="4736592"/>
+            <a:ext cx="1188720" cy="292608"/>
+          </a:xfrm>
+          <a:prstGeom prst="rect">
+            <a:avLst/>
+          </a:prstGeom>
+          <a:noFill/>
+          <a:ln/>
+        </p:spPr>
+        <p:txBody>
+          <a:bodyPr wrap="square" lIns="0" tIns="0" rIns="0" bIns="0" rtlCol="0" anchor="ctr"/>
+          <a:lstStyle/>
+          <a:p>
+            <a:pPr indent="0" marL="0">
+              <a:buNone/>
+            </a:pPr>
+            <a:r>
+              <a:rPr lang="en-US" sz="950" b="1" dirty="0">
+                <a:solidFill>
+                  <a:srgbClr val="0F1F3D"/>
+                </a:solidFill>
+              </a:rPr>
+              <a:t>Edges</a:t>
+            </a:r>
+            <a:endParaRPr lang="en-US" sz="950" dirty="0"/>
+          </a:p>
+        </p:txBody>
+      </p:sp>
+      <p:sp>
+        <p:nvSpPr>
+          <p:cNvPr id="69" name="Text 67"/>
+          <p:cNvSpPr/>
+          <p:nvPr/>
+        </p:nvSpPr>
+        <p:spPr>
+          <a:xfrm>
+            <a:off x="7818120" y="4736592"/>
+            <a:ext cx="3886200" cy="292608"/>
+          </a:xfrm>
+          <a:prstGeom prst="rect">
+            <a:avLst/>
+          </a:prstGeom>
+          <a:noFill/>
+          <a:ln/>
+        </p:spPr>
+        <p:txBody>
+          <a:bodyPr wrap="square" lIns="0" tIns="0" rIns="0" bIns="0" rtlCol="0" anchor="ctr"/>
+          <a:lstStyle/>
+          <a:p>
+            <a:pPr indent="0" marL="0">
+              <a:buNone/>
+            </a:pPr>
+            <a:r>
+              <a:rPr lang="en-US" sz="950" dirty="0">
+                <a:solidFill>
+                  <a:srgbClr val="3A4A60"/>
+                </a:solidFill>
+              </a:rPr>
+              <a:t>`depends_on` between modules (imports + shares_db).</a:t>
+            </a:r>
+            <a:endParaRPr lang="en-US" sz="950" dirty="0"/>
+          </a:p>
+        </p:txBody>
+      </p:sp>
+      <p:sp>
+        <p:nvSpPr>
+          <p:cNvPr id="70" name="Shape 68"/>
+          <p:cNvSpPr/>
+          <p:nvPr/>
+        </p:nvSpPr>
+        <p:spPr>
+          <a:xfrm>
+            <a:off x="6446520" y="5084064"/>
+            <a:ext cx="1280160" cy="292608"/>
+          </a:xfrm>
+          <a:prstGeom prst="rect">
+            <a:avLst/>
+          </a:prstGeom>
+          <a:solidFill>
+            <a:srgbClr val="EEF2F9"/>
+          </a:solidFill>
+          <a:ln/>
+        </p:spPr>
+      </p:sp>
+      <p:sp>
+        <p:nvSpPr>
+          <p:cNvPr id="71" name="Text 69"/>
+          <p:cNvSpPr/>
+          <p:nvPr/>
+        </p:nvSpPr>
+        <p:spPr>
+          <a:xfrm>
+            <a:off x="6492240" y="5084064"/>
+            <a:ext cx="1188720" cy="292608"/>
+          </a:xfrm>
+          <a:prstGeom prst="rect">
+            <a:avLst/>
+          </a:prstGeom>
+          <a:noFill/>
+          <a:ln/>
+        </p:spPr>
+        <p:txBody>
+          <a:bodyPr wrap="square" lIns="0" tIns="0" rIns="0" bIns="0" rtlCol="0" anchor="ctr"/>
+          <a:lstStyle/>
+          <a:p>
+            <a:pPr indent="0" marL="0">
+              <a:buNone/>
+            </a:pPr>
+            <a:r>
+              <a:rPr lang="en-US" sz="950" b="1" dirty="0">
+                <a:solidFill>
+                  <a:srgbClr val="0F1F3D"/>
+                </a:solidFill>
+              </a:rPr>
+              <a:t>Parallelism</a:t>
+            </a:r>
+            <a:endParaRPr lang="en-US" sz="950" dirty="0"/>
+          </a:p>
+        </p:txBody>
+      </p:sp>
+      <p:sp>
+        <p:nvSpPr>
+          <p:cNvPr id="72" name="Text 70"/>
+          <p:cNvSpPr/>
+          <p:nvPr/>
+        </p:nvSpPr>
+        <p:spPr>
+          <a:xfrm>
+            <a:off x="7818120" y="5084064"/>
+            <a:ext cx="3886200" cy="292608"/>
+          </a:xfrm>
+          <a:prstGeom prst="rect">
+            <a:avLst/>
+          </a:prstGeom>
+          <a:noFill/>
+          <a:ln/>
+        </p:spPr>
+        <p:txBody>
+          <a:bodyPr wrap="square" lIns="0" tIns="0" rIns="0" bIns="0" rtlCol="0" anchor="ctr"/>
+          <a:lstStyle/>
+          <a:p>
+            <a:pPr indent="0" marL="0">
+              <a:buNone/>
+            </a:pPr>
+            <a:r>
+              <a:rPr lang="en-US" sz="950" dirty="0">
+                <a:solidFill>
+                  <a:srgbClr val="3A4A60"/>
+                </a:solidFill>
+              </a:rPr>
+              <a:t>All modules inside a wave migrate concurrently.</a:t>
+            </a:r>
+            <a:endParaRPr lang="en-US" sz="950" dirty="0"/>
+          </a:p>
+        </p:txBody>
+      </p:sp>
+      <p:sp>
+        <p:nvSpPr>
+          <p:cNvPr id="73" name="Shape 71"/>
+          <p:cNvSpPr/>
+          <p:nvPr/>
+        </p:nvSpPr>
+        <p:spPr>
+          <a:xfrm>
+            <a:off x="6446520" y="5431536"/>
+            <a:ext cx="1280160" cy="292608"/>
+          </a:xfrm>
+          <a:prstGeom prst="rect">
+            <a:avLst/>
+          </a:prstGeom>
+          <a:solidFill>
+            <a:srgbClr val="EEF2F9"/>
+          </a:solidFill>
+          <a:ln/>
+        </p:spPr>
+      </p:sp>
+      <p:sp>
+        <p:nvSpPr>
+          <p:cNvPr id="74" name="Text 72"/>
+          <p:cNvSpPr/>
+          <p:nvPr/>
+        </p:nvSpPr>
+        <p:spPr>
+          <a:xfrm>
+            <a:off x="6492240" y="5431536"/>
+            <a:ext cx="1188720" cy="292608"/>
+          </a:xfrm>
+          <a:prstGeom prst="rect">
+            <a:avLst/>
+          </a:prstGeom>
+          <a:noFill/>
+          <a:ln/>
+        </p:spPr>
+        <p:txBody>
+          <a:bodyPr wrap="square" lIns="0" tIns="0" rIns="0" bIns="0" rtlCol="0" anchor="ctr"/>
+          <a:lstStyle/>
+          <a:p>
+            <a:pPr indent="0" marL="0">
+              <a:buNone/>
+            </a:pPr>
+            <a:r>
+              <a:rPr lang="en-US" sz="950" b="1" dirty="0">
+                <a:solidFill>
+                  <a:srgbClr val="0F1F3D"/>
+                </a:solidFill>
+              </a:rPr>
+              <a:t>Persistence</a:t>
+            </a:r>
+            <a:endParaRPr lang="en-US" sz="950" dirty="0"/>
+          </a:p>
+        </p:txBody>
+      </p:sp>
+      <p:sp>
+        <p:nvSpPr>
+          <p:cNvPr id="75" name="Text 73"/>
+          <p:cNvSpPr/>
+          <p:nvPr/>
+        </p:nvSpPr>
+        <p:spPr>
+          <a:xfrm>
+            <a:off x="7818120" y="5431536"/>
+            <a:ext cx="3886200" cy="292608"/>
+          </a:xfrm>
+          <a:prstGeom prst="rect">
+            <a:avLst/>
+          </a:prstGeom>
+          <a:noFill/>
+          <a:ln/>
+        </p:spPr>
+        <p:txBody>
+          <a:bodyPr wrap="square" lIns="0" tIns="0" rIns="0" bIns="0" rtlCol="0" anchor="ctr"/>
+          <a:lstStyle/>
+          <a:p>
+            <a:pPr indent="0" marL="0">
+              <a:buNone/>
+            </a:pPr>
+            <a:r>
+              <a:rPr lang="en-US" sz="950" dirty="0">
+                <a:solidFill>
+                  <a:srgbClr val="3A4A60"/>
+                </a:solidFill>
+              </a:rPr>
+              <a:t>`backlog.json` — ordered wave list, resumable.</a:t>
+            </a:r>
+            <a:endParaRPr lang="en-US" sz="950" dirty="0"/>
+          </a:p>
+        </p:txBody>
+      </p:sp>
+      <p:sp>
+        <p:nvSpPr>
+          <p:cNvPr id="76" name="Shape 74"/>
+          <p:cNvSpPr/>
+          <p:nvPr/>
+        </p:nvSpPr>
+        <p:spPr>
+          <a:xfrm>
+            <a:off x="6446520" y="5779008"/>
+            <a:ext cx="1280160" cy="292608"/>
+          </a:xfrm>
+          <a:prstGeom prst="rect">
+            <a:avLst/>
+          </a:prstGeom>
+          <a:solidFill>
+            <a:srgbClr val="EEF2F9"/>
+          </a:solidFill>
+          <a:ln/>
+        </p:spPr>
+      </p:sp>
+      <p:sp>
+        <p:nvSpPr>
+          <p:cNvPr id="77" name="Text 75"/>
+          <p:cNvSpPr/>
+          <p:nvPr/>
+        </p:nvSpPr>
+        <p:spPr>
+          <a:xfrm>
+            <a:off x="6492240" y="5779008"/>
+            <a:ext cx="1188720" cy="292608"/>
+          </a:xfrm>
+          <a:prstGeom prst="rect">
+            <a:avLst/>
+          </a:prstGeom>
+          <a:noFill/>
+          <a:ln/>
+        </p:spPr>
+        <p:txBody>
+          <a:bodyPr wrap="square" lIns="0" tIns="0" rIns="0" bIns="0" rtlCol="0" anchor="ctr"/>
+          <a:lstStyle/>
+          <a:p>
+            <a:pPr indent="0" marL="0">
+              <a:buNone/>
+            </a:pPr>
+            <a:r>
+              <a:rPr lang="en-US" sz="950" b="1" dirty="0">
+                <a:solidFill>
+                  <a:srgbClr val="0F1F3D"/>
+                </a:solidFill>
+              </a:rPr>
+              <a:t>Failure</a:t>
+            </a:r>
+            <a:endParaRPr lang="en-US" sz="950" dirty="0"/>
+          </a:p>
+        </p:txBody>
+      </p:sp>
+      <p:sp>
+        <p:nvSpPr>
+          <p:cNvPr id="78" name="Text 76"/>
+          <p:cNvSpPr/>
+          <p:nvPr/>
+        </p:nvSpPr>
+        <p:spPr>
+          <a:xfrm>
+            <a:off x="7818120" y="5779008"/>
+            <a:ext cx="3886200" cy="292608"/>
+          </a:xfrm>
+          <a:prstGeom prst="rect">
+            <a:avLst/>
+          </a:prstGeom>
+          <a:noFill/>
+          <a:ln/>
+        </p:spPr>
+        <p:txBody>
+          <a:bodyPr wrap="square" lIns="0" tIns="0" rIns="0" bIns="0" rtlCol="0" anchor="ctr"/>
+          <a:lstStyle/>
+          <a:p>
+            <a:pPr indent="0" marL="0">
+              <a:buNone/>
+            </a:pPr>
+            <a:r>
+              <a:rPr lang="en-US" sz="950" dirty="0">
+                <a:solidFill>
+                  <a:srgbClr val="3A4A60"/>
+                </a:solidFill>
+              </a:rPr>
+              <a:t>Module fail → transitive descendants skipped.</a:t>
+            </a:r>
+            <a:endParaRPr lang="en-US" sz="950" dirty="0"/>
+          </a:p>
+        </p:txBody>
+      </p:sp>
+      <p:sp>
+        <p:nvSpPr>
+          <p:cNvPr id="79" name="Shape 77"/>
+          <p:cNvSpPr/>
+          <p:nvPr/>
+        </p:nvSpPr>
+        <p:spPr>
+          <a:xfrm>
+            <a:off x="502920" y="6236208"/>
+            <a:ext cx="11384280" cy="347472"/>
+          </a:xfrm>
+          <a:prstGeom prst="rect">
+            <a:avLst/>
+          </a:prstGeom>
+          <a:solidFill>
+            <a:srgbClr val="0F1F3D"/>
+          </a:solidFill>
+          <a:ln/>
+        </p:spPr>
+      </p:sp>
+      <p:sp>
+        <p:nvSpPr>
+          <p:cNvPr id="80" name="Text 78"/>
+          <p:cNvSpPr/>
+          <p:nvPr/>
+        </p:nvSpPr>
+        <p:spPr>
+          <a:xfrm>
+            <a:off x="640080" y="6236208"/>
+            <a:ext cx="11155680" cy="347472"/>
+          </a:xfrm>
+          <a:prstGeom prst="rect">
+            <a:avLst/>
+          </a:prstGeom>
+          <a:noFill/>
+          <a:ln/>
+        </p:spPr>
+        <p:txBody>
+          <a:bodyPr wrap="square" lIns="0" tIns="0" rIns="0" bIns="0" rtlCol="0" anchor="ctr"/>
+          <a:lstStyle/>
+          <a:p>
+            <a:pPr indent="0" marL="0">
+              <a:buNone/>
+            </a:pPr>
+            <a:r>
+              <a:rPr lang="en-US" sz="950" i="1" dirty="0">
+                <a:solidFill>
+                  <a:srgbClr val="CADCFC"/>
+                </a:solidFill>
+              </a:rPr>
+              <a:t>Agents (scanner, grapher, coder, reviewer…) are stateless workers called by nodes. They receive prompt + @tools + AGENTS.md — never a DAG reference. One agent executes one Workflow-DAG node OR one Wave-DAG module.</a:t>
+            </a:r>
+            <a:endParaRPr lang="en-US" sz="950" dirty="0"/>
+          </a:p>
+        </p:txBody>
+      </p:sp>
+      <p:sp>
+        <p:nvSpPr>
+          <p:cNvPr id="81" name="Text 79"/>
+          <p:cNvSpPr/>
+          <p:nvPr/>
+        </p:nvSpPr>
+        <p:spPr>
+          <a:xfrm>
+            <a:off x="502920" y="6537960"/>
+            <a:ext cx="9144000" cy="274320"/>
+          </a:xfrm>
+          <a:prstGeom prst="rect">
+            <a:avLst/>
+          </a:prstGeom>
+          <a:noFill/>
+          <a:ln/>
+        </p:spPr>
+        <p:txBody>
+          <a:bodyPr wrap="square" lIns="0" tIns="0" rIns="0" bIns="0" rtlCol="0" anchor="ctr"/>
+          <a:lstStyle/>
+          <a:p>
+            <a:pPr indent="0" marL="0">
+              <a:buNone/>
+            </a:pPr>
+            <a:r>
+              <a:rPr lang="en-US" sz="900" dirty="0">
+                <a:solidFill>
+                  <a:srgbClr val="8B9CB8"/>
+                </a:solidFill>
+                <a:latin typeface="Arial" pitchFamily="34" charset="0"/>
+                <a:ea typeface="Arial" pitchFamily="34" charset="-122"/>
+                <a:cs typeface="Arial" pitchFamily="34" charset="-120"/>
+              </a:rPr>
+              <a:t>MAF Modernization Agent  •  AWS Lambda → Azure Functions  •  Design v1.0</a:t>
+            </a:r>
+            <a:endParaRPr lang="en-US" sz="900" dirty="0"/>
+          </a:p>
+        </p:txBody>
+      </p:sp>
+      <p:sp>
+        <p:nvSpPr>
+          <p:cNvPr id="82" name="Text 80"/>
+          <p:cNvSpPr/>
+          <p:nvPr/>
+        </p:nvSpPr>
+        <p:spPr>
+          <a:xfrm>
+            <a:off x="11521440" y="6537960"/>
+            <a:ext cx="457200" cy="274320"/>
+          </a:xfrm>
+          <a:prstGeom prst="rect">
+            <a:avLst/>
+          </a:prstGeom>
+          <a:noFill/>
+          <a:ln/>
+        </p:spPr>
+        <p:txBody>
+          <a:bodyPr wrap="square" lIns="0" tIns="0" rIns="0" bIns="0" rtlCol="0" anchor="ctr"/>
+          <a:lstStyle/>
+          <a:p>
+            <a:pPr algn="r" indent="0" marL="0">
+              <a:buNone/>
+            </a:pPr>
+            <a:r>
+              <a:rPr lang="en-US" sz="900" dirty="0">
+                <a:solidFill>
+                  <a:srgbClr val="8B9CB8"/>
+                </a:solidFill>
+                <a:latin typeface="Arial" pitchFamily="34" charset="0"/>
+                <a:ea typeface="Arial" pitchFamily="34" charset="-122"/>
+                <a:cs typeface="Arial" pitchFamily="34" charset="-120"/>
+              </a:rPr>
+              <a:t>5</a:t>
+            </a:r>
+            <a:endParaRPr lang="en-US" sz="900" dirty="0"/>
+          </a:p>
+        </p:txBody>
+      </p:sp>
+    </p:spTree>
+  </p:cSld>
+  <p:clrMapOvr>
+    <a:masterClrMapping/>
+  </p:clrMapOvr>
+</p:sld>
+</file>
+
+<file path=ppt/slides/slide6.xml><?xml version="1.0" encoding="utf-8"?>
+<p:sld xmlns:a="http://schemas.openxmlformats.org/drawingml/2006/main" xmlns:r="http://schemas.openxmlformats.org/officeDocument/2006/relationships" xmlns:p="http://schemas.openxmlformats.org/presentationml/2006/main">
+  <p:cSld name="Slide 6">
+    <p:bg>
+      <p:bgPr>
+        <a:solidFill>
           <a:srgbClr val="FFFFFF"/>
         </a:solidFill>
       </p:bgPr>
@@ -22891,7 +26719,7 @@
                 <a:ea typeface="Arial" pitchFamily="34" charset="-122"/>
                 <a:cs typeface="Arial" pitchFamily="34" charset="-120"/>
               </a:rPr>
-              <a:t>5</a:t>
+              <a:t>6</a:t>
             </a:r>
             <a:endParaRPr lang="en-US" sz="900" dirty="0"/>
           </a:p>
@@ -22905,9 +26733,9 @@
 </p:sld>
 </file>
 
-<file path=ppt/slides/slide6.xml><?xml version="1.0" encoding="utf-8"?>
+<file path=ppt/slides/slide7.xml><?xml version="1.0" encoding="utf-8"?>
 <p:sld xmlns:a="http://schemas.openxmlformats.org/drawingml/2006/main" xmlns:r="http://schemas.openxmlformats.org/officeDocument/2006/relationships" xmlns:p="http://schemas.openxmlformats.org/presentationml/2006/main">
-  <p:cSld name="Slide 6">
+  <p:cSld name="Slide 7">
     <p:bg>
       <p:bgPr>
         <a:solidFill>
@@ -24174,7 +28002,7 @@
                 <a:ea typeface="Arial" pitchFamily="34" charset="-122"/>
                 <a:cs typeface="Arial" pitchFamily="34" charset="-120"/>
               </a:rPr>
-              <a:t>6</a:t>
+              <a:t>7</a:t>
             </a:r>
             <a:endParaRPr lang="en-US" sz="900" dirty="0"/>
           </a:p>
@@ -24188,9 +28016,9 @@
 </p:sld>
 </file>
 
-<file path=ppt/slides/slide7.xml><?xml version="1.0" encoding="utf-8"?>
+<file path=ppt/slides/slide8.xml><?xml version="1.0" encoding="utf-8"?>
 <p:sld xmlns:a="http://schemas.openxmlformats.org/drawingml/2006/main" xmlns:r="http://schemas.openxmlformats.org/officeDocument/2006/relationships" xmlns:p="http://schemas.openxmlformats.org/presentationml/2006/main">
-  <p:cSld name="Slide 7">
+  <p:cSld name="Slide 8">
     <p:bg>
       <p:bgPr>
         <a:solidFill>
@@ -26075,7 +29903,7 @@
                 <a:ea typeface="Arial" pitchFamily="34" charset="-122"/>
                 <a:cs typeface="Arial" pitchFamily="34" charset="-120"/>
               </a:rPr>
-              <a:t>7</a:t>
+              <a:t>8</a:t>
             </a:r>
             <a:endParaRPr lang="en-US" sz="900" dirty="0"/>
           </a:p>
@@ -26089,9 +29917,9 @@
 </p:sld>
 </file>
 
-<file path=ppt/slides/slide8.xml><?xml version="1.0" encoding="utf-8"?>
+<file path=ppt/slides/slide9.xml><?xml version="1.0" encoding="utf-8"?>
 <p:sld xmlns:a="http://schemas.openxmlformats.org/drawingml/2006/main" xmlns:r="http://schemas.openxmlformats.org/officeDocument/2006/relationships" xmlns:p="http://schemas.openxmlformats.org/presentationml/2006/main">
-  <p:cSld name="Slide 8">
+  <p:cSld name="Slide 9">
     <p:bg>
       <p:bgPr>
         <a:solidFill>
@@ -27915,1150 +31743,6 @@
       <p:sp>
         <p:nvSpPr>
           <p:cNvPr id="56" name="Text 54"/>
-          <p:cNvSpPr/>
-          <p:nvPr/>
-        </p:nvSpPr>
-        <p:spPr>
-          <a:xfrm>
-            <a:off x="11521440" y="6537960"/>
-            <a:ext cx="457200" cy="274320"/>
-          </a:xfrm>
-          <a:prstGeom prst="rect">
-            <a:avLst/>
-          </a:prstGeom>
-          <a:noFill/>
-          <a:ln/>
-        </p:spPr>
-        <p:txBody>
-          <a:bodyPr wrap="square" lIns="0" tIns="0" rIns="0" bIns="0" rtlCol="0" anchor="ctr"/>
-          <a:lstStyle/>
-          <a:p>
-            <a:pPr algn="r" indent="0" marL="0">
-              <a:buNone/>
-            </a:pPr>
-            <a:r>
-              <a:rPr lang="en-US" sz="900" dirty="0">
-                <a:solidFill>
-                  <a:srgbClr val="8B9CB8"/>
-                </a:solidFill>
-                <a:latin typeface="Arial" pitchFamily="34" charset="0"/>
-                <a:ea typeface="Arial" pitchFamily="34" charset="-122"/>
-                <a:cs typeface="Arial" pitchFamily="34" charset="-120"/>
-              </a:rPr>
-              <a:t>8</a:t>
-            </a:r>
-            <a:endParaRPr lang="en-US" sz="900" dirty="0"/>
-          </a:p>
-        </p:txBody>
-      </p:sp>
-    </p:spTree>
-  </p:cSld>
-  <p:clrMapOvr>
-    <a:masterClrMapping/>
-  </p:clrMapOvr>
-</p:sld>
-</file>
-
-<file path=ppt/slides/slide9.xml><?xml version="1.0" encoding="utf-8"?>
-<p:sld xmlns:a="http://schemas.openxmlformats.org/drawingml/2006/main" xmlns:r="http://schemas.openxmlformats.org/officeDocument/2006/relationships" xmlns:p="http://schemas.openxmlformats.org/presentationml/2006/main">
-  <p:cSld name="Slide 9">
-    <p:bg>
-      <p:bgPr>
-        <a:solidFill>
-          <a:srgbClr val="FFFFFF"/>
-        </a:solidFill>
-      </p:bgPr>
-    </p:bg>
-    <p:spTree>
-      <p:nvGrpSpPr>
-        <p:cNvPr id="1" name=""/>
-        <p:cNvGrpSpPr/>
-        <p:nvPr/>
-      </p:nvGrpSpPr>
-      <p:grpSpPr>
-        <a:xfrm>
-          <a:off x="0" y="0"/>
-          <a:ext cx="0" cy="0"/>
-          <a:chOff x="0" y="0"/>
-          <a:chExt cx="0" cy="0"/>
-        </a:xfrm>
-      </p:grpSpPr>
-      <p:sp>
-        <p:nvSpPr>
-          <p:cNvPr id="2" name="Shape 0"/>
-          <p:cNvSpPr/>
-          <p:nvPr/>
-        </p:nvSpPr>
-        <p:spPr>
-          <a:xfrm>
-            <a:off x="0" y="0"/>
-            <a:ext cx="164592" cy="6858000"/>
-          </a:xfrm>
-          <a:prstGeom prst="rect">
-            <a:avLst/>
-          </a:prstGeom>
-          <a:solidFill>
-            <a:srgbClr val="2BB0ED"/>
-          </a:solidFill>
-          <a:ln/>
-        </p:spPr>
-      </p:sp>
-      <p:sp>
-        <p:nvSpPr>
-          <p:cNvPr id="3" name="Text 1"/>
-          <p:cNvSpPr/>
-          <p:nvPr/>
-        </p:nvSpPr>
-        <p:spPr>
-          <a:xfrm>
-            <a:off x="502920" y="320040"/>
-            <a:ext cx="10972800" cy="274320"/>
-          </a:xfrm>
-          <a:prstGeom prst="rect">
-            <a:avLst/>
-          </a:prstGeom>
-          <a:noFill/>
-          <a:ln/>
-        </p:spPr>
-        <p:txBody>
-          <a:bodyPr wrap="square" lIns="0" tIns="0" rIns="0" bIns="0" rtlCol="0" anchor="ctr"/>
-          <a:lstStyle/>
-          <a:p>
-            <a:pPr indent="0" marL="0">
-              <a:buNone/>
-            </a:pPr>
-            <a:r>
-              <a:rPr lang="en-US" sz="1100" b="1" spc="400" kern="0" dirty="0">
-                <a:solidFill>
-                  <a:srgbClr val="FF9900"/>
-                </a:solidFill>
-                <a:latin typeface="Arial" pitchFamily="34" charset="0"/>
-                <a:ea typeface="Arial" pitchFamily="34" charset="-122"/>
-                <a:cs typeface="Arial" pitchFamily="34" charset="-120"/>
-              </a:rPr>
-              <a:t>HARNESS COMPONENT</a:t>
-            </a:r>
-            <a:endParaRPr lang="en-US" sz="1100" dirty="0"/>
-          </a:p>
-        </p:txBody>
-      </p:sp>
-      <p:sp>
-        <p:nvSpPr>
-          <p:cNvPr id="4" name="Text 2"/>
-          <p:cNvSpPr/>
-          <p:nvPr/>
-        </p:nvSpPr>
-        <p:spPr>
-          <a:xfrm>
-            <a:off x="502920" y="548640"/>
-            <a:ext cx="11247120" cy="731520"/>
-          </a:xfrm>
-          <a:prstGeom prst="rect">
-            <a:avLst/>
-          </a:prstGeom>
-          <a:noFill/>
-          <a:ln/>
-        </p:spPr>
-        <p:txBody>
-          <a:bodyPr wrap="square" lIns="0" tIns="0" rIns="0" bIns="0" rtlCol="0" anchor="ctr"/>
-          <a:lstStyle/>
-          <a:p>
-            <a:pPr indent="0" marL="0">
-              <a:buNone/>
-            </a:pPr>
-            <a:r>
-              <a:rPr lang="en-US" sz="3000" b="1" dirty="0">
-                <a:solidFill>
-                  <a:srgbClr val="0F1F3D"/>
-                </a:solidFill>
-                <a:latin typeface="Georgia" pitchFamily="34" charset="0"/>
-                <a:ea typeface="Georgia" pitchFamily="34" charset="-122"/>
-                <a:cs typeface="Georgia" pitchFamily="34" charset="-120"/>
-              </a:rPr>
-              <a:t>Context Engineering — Fit the Code into the Window</a:t>
-            </a:r>
-            <a:endParaRPr lang="en-US" sz="3000" dirty="0"/>
-          </a:p>
-        </p:txBody>
-      </p:sp>
-      <p:sp>
-        <p:nvSpPr>
-          <p:cNvPr id="5" name="Shape 3"/>
-          <p:cNvSpPr/>
-          <p:nvPr/>
-        </p:nvSpPr>
-        <p:spPr>
-          <a:xfrm>
-            <a:off x="502920" y="1554480"/>
-            <a:ext cx="3657600" cy="2194560"/>
-          </a:xfrm>
-          <a:prstGeom prst="rect">
-            <a:avLst/>
-          </a:prstGeom>
-          <a:solidFill>
-            <a:srgbClr val="F5F7FA"/>
-          </a:solidFill>
-          <a:ln w="9525">
-            <a:solidFill>
-              <a:srgbClr val="CADCFC"/>
-            </a:solidFill>
-            <a:prstDash val="solid"/>
-          </a:ln>
-        </p:spPr>
-      </p:sp>
-      <p:sp>
-        <p:nvSpPr>
-          <p:cNvPr id="6" name="Shape 4"/>
-          <p:cNvSpPr/>
-          <p:nvPr/>
-        </p:nvSpPr>
-        <p:spPr>
-          <a:xfrm>
-            <a:off x="502920" y="1554480"/>
-            <a:ext cx="3657600" cy="640080"/>
-          </a:xfrm>
-          <a:prstGeom prst="rect">
-            <a:avLst/>
-          </a:prstGeom>
-          <a:solidFill>
-            <a:srgbClr val="0F1F3D"/>
-          </a:solidFill>
-          <a:ln/>
-        </p:spPr>
-      </p:sp>
-      <p:sp>
-        <p:nvSpPr>
-          <p:cNvPr id="7" name="Text 5"/>
-          <p:cNvSpPr/>
-          <p:nvPr/>
-        </p:nvSpPr>
-        <p:spPr>
-          <a:xfrm>
-            <a:off x="685800" y="1645920"/>
-            <a:ext cx="3383280" cy="274320"/>
-          </a:xfrm>
-          <a:prstGeom prst="rect">
-            <a:avLst/>
-          </a:prstGeom>
-          <a:noFill/>
-          <a:ln/>
-        </p:spPr>
-        <p:txBody>
-          <a:bodyPr wrap="square" lIns="0" tIns="0" rIns="0" bIns="0" rtlCol="0" anchor="ctr"/>
-          <a:lstStyle/>
-          <a:p>
-            <a:pPr indent="0" marL="0">
-              <a:buNone/>
-            </a:pPr>
-            <a:r>
-              <a:rPr lang="en-US" sz="1250" b="1" dirty="0">
-                <a:solidFill>
-                  <a:srgbClr val="2BB0ED"/>
-                </a:solidFill>
-                <a:latin typeface="Consolas" pitchFamily="34" charset="0"/>
-                <a:ea typeface="Consolas" pitchFamily="34" charset="-122"/>
-                <a:cs typeface="Consolas" pitchFamily="34" charset="-120"/>
-              </a:rPr>
-              <a:t>chunker.py</a:t>
-            </a:r>
-            <a:endParaRPr lang="en-US" sz="1250" dirty="0"/>
-          </a:p>
-        </p:txBody>
-      </p:sp>
-      <p:sp>
-        <p:nvSpPr>
-          <p:cNvPr id="8" name="Text 6"/>
-          <p:cNvSpPr/>
-          <p:nvPr/>
-        </p:nvSpPr>
-        <p:spPr>
-          <a:xfrm>
-            <a:off x="685800" y="1920240"/>
-            <a:ext cx="3383280" cy="228600"/>
-          </a:xfrm>
-          <a:prstGeom prst="rect">
-            <a:avLst/>
-          </a:prstGeom>
-          <a:noFill/>
-          <a:ln/>
-        </p:spPr>
-        <p:txBody>
-          <a:bodyPr wrap="square" lIns="0" tIns="0" rIns="0" bIns="0" rtlCol="0" anchor="ctr"/>
-          <a:lstStyle/>
-          <a:p>
-            <a:pPr indent="0" marL="0">
-              <a:buNone/>
-            </a:pPr>
-            <a:r>
-              <a:rPr lang="en-US" sz="1000" i="1" dirty="0">
-                <a:solidFill>
-                  <a:srgbClr val="CADCFC"/>
-                </a:solidFill>
-              </a:rPr>
-              <a:t>Semantic file splitting</a:t>
-            </a:r>
-            <a:endParaRPr lang="en-US" sz="1000" dirty="0"/>
-          </a:p>
-        </p:txBody>
-      </p:sp>
-      <p:sp>
-        <p:nvSpPr>
-          <p:cNvPr id="9" name="Text 7"/>
-          <p:cNvSpPr/>
-          <p:nvPr/>
-        </p:nvSpPr>
-        <p:spPr>
-          <a:xfrm>
-            <a:off x="685800" y="2331720"/>
-            <a:ext cx="3383280" cy="1371600"/>
-          </a:xfrm>
-          <a:prstGeom prst="rect">
-            <a:avLst/>
-          </a:prstGeom>
-          <a:noFill/>
-          <a:ln/>
-        </p:spPr>
-        <p:txBody>
-          <a:bodyPr wrap="square" lIns="0" tIns="0" rIns="0" bIns="0" rtlCol="0" anchor="t"/>
-          <a:lstStyle/>
-          <a:p>
-            <a:pPr indent="0" marL="0">
-              <a:buNone/>
-            </a:pPr>
-            <a:r>
-              <a:rPr lang="en-US" sz="1050" dirty="0">
-                <a:solidFill>
-                  <a:srgbClr val="3A4A60"/>
-                </a:solidFill>
-              </a:rPr>
-              <a:t>AST-boundary-aware chunks. Never breaks a function mid-body; groups related imports+decorator+def blocks.</a:t>
-            </a:r>
-            <a:endParaRPr lang="en-US" sz="1050" dirty="0"/>
-          </a:p>
-        </p:txBody>
-      </p:sp>
-      <p:sp>
-        <p:nvSpPr>
-          <p:cNvPr id="10" name="Shape 8"/>
-          <p:cNvSpPr/>
-          <p:nvPr/>
-        </p:nvSpPr>
-        <p:spPr>
-          <a:xfrm>
-            <a:off x="4297680" y="1554480"/>
-            <a:ext cx="3657600" cy="2194560"/>
-          </a:xfrm>
-          <a:prstGeom prst="rect">
-            <a:avLst/>
-          </a:prstGeom>
-          <a:solidFill>
-            <a:srgbClr val="F5F7FA"/>
-          </a:solidFill>
-          <a:ln w="9525">
-            <a:solidFill>
-              <a:srgbClr val="CADCFC"/>
-            </a:solidFill>
-            <a:prstDash val="solid"/>
-          </a:ln>
-        </p:spPr>
-      </p:sp>
-      <p:sp>
-        <p:nvSpPr>
-          <p:cNvPr id="11" name="Shape 9"/>
-          <p:cNvSpPr/>
-          <p:nvPr/>
-        </p:nvSpPr>
-        <p:spPr>
-          <a:xfrm>
-            <a:off x="4297680" y="1554480"/>
-            <a:ext cx="3657600" cy="640080"/>
-          </a:xfrm>
-          <a:prstGeom prst="rect">
-            <a:avLst/>
-          </a:prstGeom>
-          <a:solidFill>
-            <a:srgbClr val="0F1F3D"/>
-          </a:solidFill>
-          <a:ln/>
-        </p:spPr>
-      </p:sp>
-      <p:sp>
-        <p:nvSpPr>
-          <p:cNvPr id="12" name="Text 10"/>
-          <p:cNvSpPr/>
-          <p:nvPr/>
-        </p:nvSpPr>
-        <p:spPr>
-          <a:xfrm>
-            <a:off x="4480560" y="1645920"/>
-            <a:ext cx="3383280" cy="274320"/>
-          </a:xfrm>
-          <a:prstGeom prst="rect">
-            <a:avLst/>
-          </a:prstGeom>
-          <a:noFill/>
-          <a:ln/>
-        </p:spPr>
-        <p:txBody>
-          <a:bodyPr wrap="square" lIns="0" tIns="0" rIns="0" bIns="0" rtlCol="0" anchor="ctr"/>
-          <a:lstStyle/>
-          <a:p>
-            <a:pPr indent="0" marL="0">
-              <a:buNone/>
-            </a:pPr>
-            <a:r>
-              <a:rPr lang="en-US" sz="1250" b="1" dirty="0">
-                <a:solidFill>
-                  <a:srgbClr val="2BB0ED"/>
-                </a:solidFill>
-                <a:latin typeface="Consolas" pitchFamily="34" charset="0"/>
-                <a:ea typeface="Consolas" pitchFamily="34" charset="-122"/>
-                <a:cs typeface="Consolas" pitchFamily="34" charset="-120"/>
-              </a:rPr>
-              <a:t>compressor.py</a:t>
-            </a:r>
-            <a:endParaRPr lang="en-US" sz="1250" dirty="0"/>
-          </a:p>
-        </p:txBody>
-      </p:sp>
-      <p:sp>
-        <p:nvSpPr>
-          <p:cNvPr id="13" name="Text 11"/>
-          <p:cNvSpPr/>
-          <p:nvPr/>
-        </p:nvSpPr>
-        <p:spPr>
-          <a:xfrm>
-            <a:off x="4480560" y="1920240"/>
-            <a:ext cx="3383280" cy="228600"/>
-          </a:xfrm>
-          <a:prstGeom prst="rect">
-            <a:avLst/>
-          </a:prstGeom>
-          <a:noFill/>
-          <a:ln/>
-        </p:spPr>
-        <p:txBody>
-          <a:bodyPr wrap="square" lIns="0" tIns="0" rIns="0" bIns="0" rtlCol="0" anchor="ctr"/>
-          <a:lstStyle/>
-          <a:p>
-            <a:pPr indent="0" marL="0">
-              <a:buNone/>
-            </a:pPr>
-            <a:r>
-              <a:rPr lang="en-US" sz="1000" i="1" dirty="0">
-                <a:solidFill>
-                  <a:srgbClr val="CADCFC"/>
-                </a:solidFill>
-              </a:rPr>
-              <a:t>Progressive compression</a:t>
-            </a:r>
-            <a:endParaRPr lang="en-US" sz="1000" dirty="0"/>
-          </a:p>
-        </p:txBody>
-      </p:sp>
-      <p:sp>
-        <p:nvSpPr>
-          <p:cNvPr id="14" name="Text 12"/>
-          <p:cNvSpPr/>
-          <p:nvPr/>
-        </p:nvSpPr>
-        <p:spPr>
-          <a:xfrm>
-            <a:off x="4480560" y="2331720"/>
-            <a:ext cx="3383280" cy="1371600"/>
-          </a:xfrm>
-          <a:prstGeom prst="rect">
-            <a:avLst/>
-          </a:prstGeom>
-          <a:noFill/>
-          <a:ln/>
-        </p:spPr>
-        <p:txBody>
-          <a:bodyPr wrap="square" lIns="0" tIns="0" rIns="0" bIns="0" rtlCol="0" anchor="t"/>
-          <a:lstStyle/>
-          <a:p>
-            <a:pPr indent="0" marL="0">
-              <a:buNone/>
-            </a:pPr>
-            <a:r>
-              <a:rPr lang="en-US" sz="1050" dirty="0">
-                <a:solidFill>
-                  <a:srgbClr val="3A4A60"/>
-                </a:solidFill>
-              </a:rPr>
-              <a:t>Older turns compressed to 30% density; recent turns + current artifacts kept verbatim. Preserves decision trail.</a:t>
-            </a:r>
-            <a:endParaRPr lang="en-US" sz="1050" dirty="0"/>
-          </a:p>
-        </p:txBody>
-      </p:sp>
-      <p:sp>
-        <p:nvSpPr>
-          <p:cNvPr id="15" name="Shape 13"/>
-          <p:cNvSpPr/>
-          <p:nvPr/>
-        </p:nvSpPr>
-        <p:spPr>
-          <a:xfrm>
-            <a:off x="8092440" y="1554480"/>
-            <a:ext cx="3657600" cy="2194560"/>
-          </a:xfrm>
-          <a:prstGeom prst="rect">
-            <a:avLst/>
-          </a:prstGeom>
-          <a:solidFill>
-            <a:srgbClr val="F5F7FA"/>
-          </a:solidFill>
-          <a:ln w="9525">
-            <a:solidFill>
-              <a:srgbClr val="CADCFC"/>
-            </a:solidFill>
-            <a:prstDash val="solid"/>
-          </a:ln>
-        </p:spPr>
-      </p:sp>
-      <p:sp>
-        <p:nvSpPr>
-          <p:cNvPr id="16" name="Shape 14"/>
-          <p:cNvSpPr/>
-          <p:nvPr/>
-        </p:nvSpPr>
-        <p:spPr>
-          <a:xfrm>
-            <a:off x="8092440" y="1554480"/>
-            <a:ext cx="3657600" cy="640080"/>
-          </a:xfrm>
-          <a:prstGeom prst="rect">
-            <a:avLst/>
-          </a:prstGeom>
-          <a:solidFill>
-            <a:srgbClr val="0F1F3D"/>
-          </a:solidFill>
-          <a:ln/>
-        </p:spPr>
-      </p:sp>
-      <p:sp>
-        <p:nvSpPr>
-          <p:cNvPr id="17" name="Text 15"/>
-          <p:cNvSpPr/>
-          <p:nvPr/>
-        </p:nvSpPr>
-        <p:spPr>
-          <a:xfrm>
-            <a:off x="8275320" y="1645920"/>
-            <a:ext cx="3383280" cy="274320"/>
-          </a:xfrm>
-          <a:prstGeom prst="rect">
-            <a:avLst/>
-          </a:prstGeom>
-          <a:noFill/>
-          <a:ln/>
-        </p:spPr>
-        <p:txBody>
-          <a:bodyPr wrap="square" lIns="0" tIns="0" rIns="0" bIns="0" rtlCol="0" anchor="ctr"/>
-          <a:lstStyle/>
-          <a:p>
-            <a:pPr indent="0" marL="0">
-              <a:buNone/>
-            </a:pPr>
-            <a:r>
-              <a:rPr lang="en-US" sz="1250" b="1" dirty="0">
-                <a:solidFill>
-                  <a:srgbClr val="2BB0ED"/>
-                </a:solidFill>
-                <a:latin typeface="Consolas" pitchFamily="34" charset="0"/>
-                <a:ea typeface="Consolas" pitchFamily="34" charset="-122"/>
-                <a:cs typeface="Consolas" pitchFamily="34" charset="-120"/>
-              </a:rPr>
-              <a:t>token_estimator.py</a:t>
-            </a:r>
-            <a:endParaRPr lang="en-US" sz="1250" dirty="0"/>
-          </a:p>
-        </p:txBody>
-      </p:sp>
-      <p:sp>
-        <p:nvSpPr>
-          <p:cNvPr id="18" name="Text 16"/>
-          <p:cNvSpPr/>
-          <p:nvPr/>
-        </p:nvSpPr>
-        <p:spPr>
-          <a:xfrm>
-            <a:off x="8275320" y="1920240"/>
-            <a:ext cx="3383280" cy="228600"/>
-          </a:xfrm>
-          <a:prstGeom prst="rect">
-            <a:avLst/>
-          </a:prstGeom>
-          <a:noFill/>
-          <a:ln/>
-        </p:spPr>
-        <p:txBody>
-          <a:bodyPr wrap="square" lIns="0" tIns="0" rIns="0" bIns="0" rtlCol="0" anchor="ctr"/>
-          <a:lstStyle/>
-          <a:p>
-            <a:pPr indent="0" marL="0">
-              <a:buNone/>
-            </a:pPr>
-            <a:r>
-              <a:rPr lang="en-US" sz="1000" i="1" dirty="0">
-                <a:solidFill>
-                  <a:srgbClr val="CADCFC"/>
-                </a:solidFill>
-              </a:rPr>
-              <a:t>Budget calculator</a:t>
-            </a:r>
-            <a:endParaRPr lang="en-US" sz="1000" dirty="0"/>
-          </a:p>
-        </p:txBody>
-      </p:sp>
-      <p:sp>
-        <p:nvSpPr>
-          <p:cNvPr id="19" name="Text 17"/>
-          <p:cNvSpPr/>
-          <p:nvPr/>
-        </p:nvSpPr>
-        <p:spPr>
-          <a:xfrm>
-            <a:off x="8275320" y="2331720"/>
-            <a:ext cx="3383280" cy="1371600"/>
-          </a:xfrm>
-          <a:prstGeom prst="rect">
-            <a:avLst/>
-          </a:prstGeom>
-          <a:noFill/>
-          <a:ln/>
-        </p:spPr>
-        <p:txBody>
-          <a:bodyPr wrap="square" lIns="0" tIns="0" rIns="0" bIns="0" rtlCol="0" anchor="t"/>
-          <a:lstStyle/>
-          <a:p>
-            <a:pPr indent="0" marL="0">
-              <a:buNone/>
-            </a:pPr>
-            <a:r>
-              <a:rPr lang="en-US" sz="1050" dirty="0">
-                <a:solidFill>
-                  <a:srgbClr val="3A4A60"/>
-                </a:solidFill>
-              </a:rPr>
-              <a:t>chars ÷ 3.0 × role-multiplier. Analyzer/Reviewer → full; Coder → tighter. Used to pick model tier.</a:t>
-            </a:r>
-            <a:endParaRPr lang="en-US" sz="1050" dirty="0"/>
-          </a:p>
-        </p:txBody>
-      </p:sp>
-      <p:sp>
-        <p:nvSpPr>
-          <p:cNvPr id="20" name="Shape 18"/>
-          <p:cNvSpPr/>
-          <p:nvPr/>
-        </p:nvSpPr>
-        <p:spPr>
-          <a:xfrm>
-            <a:off x="502920" y="3886200"/>
-            <a:ext cx="3657600" cy="2194560"/>
-          </a:xfrm>
-          <a:prstGeom prst="rect">
-            <a:avLst/>
-          </a:prstGeom>
-          <a:solidFill>
-            <a:srgbClr val="F5F7FA"/>
-          </a:solidFill>
-          <a:ln w="9525">
-            <a:solidFill>
-              <a:srgbClr val="CADCFC"/>
-            </a:solidFill>
-            <a:prstDash val="solid"/>
-          </a:ln>
-        </p:spPr>
-      </p:sp>
-      <p:sp>
-        <p:nvSpPr>
-          <p:cNvPr id="21" name="Shape 19"/>
-          <p:cNvSpPr/>
-          <p:nvPr/>
-        </p:nvSpPr>
-        <p:spPr>
-          <a:xfrm>
-            <a:off x="502920" y="3886200"/>
-            <a:ext cx="3657600" cy="640080"/>
-          </a:xfrm>
-          <a:prstGeom prst="rect">
-            <a:avLst/>
-          </a:prstGeom>
-          <a:solidFill>
-            <a:srgbClr val="0F1F3D"/>
-          </a:solidFill>
-          <a:ln/>
-        </p:spPr>
-      </p:sp>
-      <p:sp>
-        <p:nvSpPr>
-          <p:cNvPr id="22" name="Text 20"/>
-          <p:cNvSpPr/>
-          <p:nvPr/>
-        </p:nvSpPr>
-        <p:spPr>
-          <a:xfrm>
-            <a:off x="685800" y="3977640"/>
-            <a:ext cx="3383280" cy="274320"/>
-          </a:xfrm>
-          <a:prstGeom prst="rect">
-            <a:avLst/>
-          </a:prstGeom>
-          <a:noFill/>
-          <a:ln/>
-        </p:spPr>
-        <p:txBody>
-          <a:bodyPr wrap="square" lIns="0" tIns="0" rIns="0" bIns="0" rtlCol="0" anchor="ctr"/>
-          <a:lstStyle/>
-          <a:p>
-            <a:pPr indent="0" marL="0">
-              <a:buNone/>
-            </a:pPr>
-            <a:r>
-              <a:rPr lang="en-US" sz="1250" b="1" dirty="0">
-                <a:solidFill>
-                  <a:srgbClr val="2BB0ED"/>
-                </a:solidFill>
-                <a:latin typeface="Consolas" pitchFamily="34" charset="0"/>
-                <a:ea typeface="Consolas" pitchFamily="34" charset="-122"/>
-                <a:cs typeface="Consolas" pitchFamily="34" charset="-120"/>
-              </a:rPr>
-              <a:t>complexity_scorer.py</a:t>
-            </a:r>
-            <a:endParaRPr lang="en-US" sz="1250" dirty="0"/>
-          </a:p>
-        </p:txBody>
-      </p:sp>
-      <p:sp>
-        <p:nvSpPr>
-          <p:cNvPr id="23" name="Text 21"/>
-          <p:cNvSpPr/>
-          <p:nvPr/>
-        </p:nvSpPr>
-        <p:spPr>
-          <a:xfrm>
-            <a:off x="685800" y="4251960"/>
-            <a:ext cx="3383280" cy="228600"/>
-          </a:xfrm>
-          <a:prstGeom prst="rect">
-            <a:avLst/>
-          </a:prstGeom>
-          <a:noFill/>
-          <a:ln/>
-        </p:spPr>
-        <p:txBody>
-          <a:bodyPr wrap="square" lIns="0" tIns="0" rIns="0" bIns="0" rtlCol="0" anchor="ctr"/>
-          <a:lstStyle/>
-          <a:p>
-            <a:pPr indent="0" marL="0">
-              <a:buNone/>
-            </a:pPr>
-            <a:r>
-              <a:rPr lang="en-US" sz="1000" i="1" dirty="0">
-                <a:solidFill>
-                  <a:srgbClr val="CADCFC"/>
-                </a:solidFill>
-              </a:rPr>
-              <a:t>12-pattern Lambda score</a:t>
-            </a:r>
-            <a:endParaRPr lang="en-US" sz="1000" dirty="0"/>
-          </a:p>
-        </p:txBody>
-      </p:sp>
-      <p:sp>
-        <p:nvSpPr>
-          <p:cNvPr id="24" name="Text 22"/>
-          <p:cNvSpPr/>
-          <p:nvPr/>
-        </p:nvSpPr>
-        <p:spPr>
-          <a:xfrm>
-            <a:off x="685800" y="4663440"/>
-            <a:ext cx="3383280" cy="1371600"/>
-          </a:xfrm>
-          <a:prstGeom prst="rect">
-            <a:avLst/>
-          </a:prstGeom>
-          <a:noFill/>
-          <a:ln/>
-        </p:spPr>
-        <p:txBody>
-          <a:bodyPr wrap="square" lIns="0" tIns="0" rIns="0" bIns="0" rtlCol="0" anchor="t"/>
-          <a:lstStyle/>
-          <a:p>
-            <a:pPr indent="0" marL="0">
-              <a:buNone/>
-            </a:pPr>
-            <a:r>
-              <a:rPr lang="en-US" sz="1050" dirty="0">
-                <a:solidFill>
-                  <a:srgbClr val="3A4A60"/>
-                </a:solidFill>
-              </a:rPr>
-              <a:t>Detects idempotency keys, stream handlers, SSM patterns, transactWrite, async fan-out. Drives speed profile selection.</a:t>
-            </a:r>
-            <a:endParaRPr lang="en-US" sz="1050" dirty="0"/>
-          </a:p>
-        </p:txBody>
-      </p:sp>
-      <p:sp>
-        <p:nvSpPr>
-          <p:cNvPr id="25" name="Shape 23"/>
-          <p:cNvSpPr/>
-          <p:nvPr/>
-        </p:nvSpPr>
-        <p:spPr>
-          <a:xfrm>
-            <a:off x="4297680" y="3886200"/>
-            <a:ext cx="3657600" cy="2194560"/>
-          </a:xfrm>
-          <a:prstGeom prst="rect">
-            <a:avLst/>
-          </a:prstGeom>
-          <a:solidFill>
-            <a:srgbClr val="F5F7FA"/>
-          </a:solidFill>
-          <a:ln w="9525">
-            <a:solidFill>
-              <a:srgbClr val="CADCFC"/>
-            </a:solidFill>
-            <a:prstDash val="solid"/>
-          </a:ln>
-        </p:spPr>
-      </p:sp>
-      <p:sp>
-        <p:nvSpPr>
-          <p:cNvPr id="26" name="Shape 24"/>
-          <p:cNvSpPr/>
-          <p:nvPr/>
-        </p:nvSpPr>
-        <p:spPr>
-          <a:xfrm>
-            <a:off x="4297680" y="3886200"/>
-            <a:ext cx="3657600" cy="640080"/>
-          </a:xfrm>
-          <a:prstGeom prst="rect">
-            <a:avLst/>
-          </a:prstGeom>
-          <a:solidFill>
-            <a:srgbClr val="0F1F3D"/>
-          </a:solidFill>
-          <a:ln/>
-        </p:spPr>
-      </p:sp>
-      <p:sp>
-        <p:nvSpPr>
-          <p:cNvPr id="27" name="Text 25"/>
-          <p:cNvSpPr/>
-          <p:nvPr/>
-        </p:nvSpPr>
-        <p:spPr>
-          <a:xfrm>
-            <a:off x="4480560" y="3977640"/>
-            <a:ext cx="3383280" cy="274320"/>
-          </a:xfrm>
-          <a:prstGeom prst="rect">
-            <a:avLst/>
-          </a:prstGeom>
-          <a:noFill/>
-          <a:ln/>
-        </p:spPr>
-        <p:txBody>
-          <a:bodyPr wrap="square" lIns="0" tIns="0" rIns="0" bIns="0" rtlCol="0" anchor="ctr"/>
-          <a:lstStyle/>
-          <a:p>
-            <a:pPr indent="0" marL="0">
-              <a:buNone/>
-            </a:pPr>
-            <a:r>
-              <a:rPr lang="en-US" sz="1250" b="1" dirty="0">
-                <a:solidFill>
-                  <a:srgbClr val="2BB0ED"/>
-                </a:solidFill>
-                <a:latin typeface="Consolas" pitchFamily="34" charset="0"/>
-                <a:ea typeface="Consolas" pitchFamily="34" charset="-122"/>
-                <a:cs typeface="Consolas" pitchFamily="34" charset="-120"/>
-              </a:rPr>
-              <a:t>AGENTS.md injection</a:t>
-            </a:r>
-            <a:endParaRPr lang="en-US" sz="1250" dirty="0"/>
-          </a:p>
-        </p:txBody>
-      </p:sp>
-      <p:sp>
-        <p:nvSpPr>
-          <p:cNvPr id="28" name="Text 26"/>
-          <p:cNvSpPr/>
-          <p:nvPr/>
-        </p:nvSpPr>
-        <p:spPr>
-          <a:xfrm>
-            <a:off x="4480560" y="4251960"/>
-            <a:ext cx="3383280" cy="228600"/>
-          </a:xfrm>
-          <a:prstGeom prst="rect">
-            <a:avLst/>
-          </a:prstGeom>
-          <a:noFill/>
-          <a:ln/>
-        </p:spPr>
-        <p:txBody>
-          <a:bodyPr wrap="square" lIns="0" tIns="0" rIns="0" bIns="0" rtlCol="0" anchor="ctr"/>
-          <a:lstStyle/>
-          <a:p>
-            <a:pPr indent="0" marL="0">
-              <a:buNone/>
-            </a:pPr>
-            <a:r>
-              <a:rPr lang="en-US" sz="1000" i="1" dirty="0">
-                <a:solidFill>
-                  <a:srgbClr val="CADCFC"/>
-                </a:solidFill>
-              </a:rPr>
-              <a:t>Repo + module context</a:t>
-            </a:r>
-            <a:endParaRPr lang="en-US" sz="1000" dirty="0"/>
-          </a:p>
-        </p:txBody>
-      </p:sp>
-      <p:sp>
-        <p:nvSpPr>
-          <p:cNvPr id="29" name="Text 27"/>
-          <p:cNvSpPr/>
-          <p:nvPr/>
-        </p:nvSpPr>
-        <p:spPr>
-          <a:xfrm>
-            <a:off x="4480560" y="4663440"/>
-            <a:ext cx="3383280" cy="1371600"/>
-          </a:xfrm>
-          <a:prstGeom prst="rect">
-            <a:avLst/>
-          </a:prstGeom>
-          <a:noFill/>
-          <a:ln/>
-        </p:spPr>
-        <p:txBody>
-          <a:bodyPr wrap="square" lIns="0" tIns="0" rIns="0" bIns="0" rtlCol="0" anchor="t"/>
-          <a:lstStyle/>
-          <a:p>
-            <a:pPr indent="0" marL="0">
-              <a:buNone/>
-            </a:pPr>
-            <a:r>
-              <a:rPr lang="en-US" sz="1050" dirty="0">
-                <a:solidFill>
-                  <a:srgbClr val="3A4A60"/>
-                </a:solidFill>
-              </a:rPr>
-              <a:t>Repo-level and module-level AGENTS.md appended after quality-principles, learned-rules, program.md. Module overrides win.</a:t>
-            </a:r>
-            <a:endParaRPr lang="en-US" sz="1050" dirty="0"/>
-          </a:p>
-        </p:txBody>
-      </p:sp>
-      <p:sp>
-        <p:nvSpPr>
-          <p:cNvPr id="30" name="Shape 28"/>
-          <p:cNvSpPr/>
-          <p:nvPr/>
-        </p:nvSpPr>
-        <p:spPr>
-          <a:xfrm>
-            <a:off x="8092440" y="3886200"/>
-            <a:ext cx="3657600" cy="2194560"/>
-          </a:xfrm>
-          <a:prstGeom prst="rect">
-            <a:avLst/>
-          </a:prstGeom>
-          <a:solidFill>
-            <a:srgbClr val="F5F7FA"/>
-          </a:solidFill>
-          <a:ln w="9525">
-            <a:solidFill>
-              <a:srgbClr val="CADCFC"/>
-            </a:solidFill>
-            <a:prstDash val="solid"/>
-          </a:ln>
-        </p:spPr>
-      </p:sp>
-      <p:sp>
-        <p:nvSpPr>
-          <p:cNvPr id="31" name="Shape 29"/>
-          <p:cNvSpPr/>
-          <p:nvPr/>
-        </p:nvSpPr>
-        <p:spPr>
-          <a:xfrm>
-            <a:off x="8092440" y="3886200"/>
-            <a:ext cx="3657600" cy="640080"/>
-          </a:xfrm>
-          <a:prstGeom prst="rect">
-            <a:avLst/>
-          </a:prstGeom>
-          <a:solidFill>
-            <a:srgbClr val="0F1F3D"/>
-          </a:solidFill>
-          <a:ln/>
-        </p:spPr>
-      </p:sp>
-      <p:sp>
-        <p:nvSpPr>
-          <p:cNvPr id="32" name="Text 30"/>
-          <p:cNvSpPr/>
-          <p:nvPr/>
-        </p:nvSpPr>
-        <p:spPr>
-          <a:xfrm>
-            <a:off x="8275320" y="3977640"/>
-            <a:ext cx="3383280" cy="274320"/>
-          </a:xfrm>
-          <a:prstGeom prst="rect">
-            <a:avLst/>
-          </a:prstGeom>
-          <a:noFill/>
-          <a:ln/>
-        </p:spPr>
-        <p:txBody>
-          <a:bodyPr wrap="square" lIns="0" tIns="0" rIns="0" bIns="0" rtlCol="0" anchor="ctr"/>
-          <a:lstStyle/>
-          <a:p>
-            <a:pPr indent="0" marL="0">
-              <a:buNone/>
-            </a:pPr>
-            <a:r>
-              <a:rPr lang="en-US" sz="1250" b="1" dirty="0">
-                <a:solidFill>
-                  <a:srgbClr val="2BB0ED"/>
-                </a:solidFill>
-                <a:latin typeface="Consolas" pitchFamily="34" charset="0"/>
-                <a:ea typeface="Consolas" pitchFamily="34" charset="-122"/>
-                <a:cs typeface="Consolas" pitchFamily="34" charset="-120"/>
-              </a:rPr>
-              <a:t>Stage prompt layering</a:t>
-            </a:r>
-            <a:endParaRPr lang="en-US" sz="1250" dirty="0"/>
-          </a:p>
-        </p:txBody>
-      </p:sp>
-      <p:sp>
-        <p:nvSpPr>
-          <p:cNvPr id="33" name="Text 31"/>
-          <p:cNvSpPr/>
-          <p:nvPr/>
-        </p:nvSpPr>
-        <p:spPr>
-          <a:xfrm>
-            <a:off x="8275320" y="4251960"/>
-            <a:ext cx="3383280" cy="228600"/>
-          </a:xfrm>
-          <a:prstGeom prst="rect">
-            <a:avLst/>
-          </a:prstGeom>
-          <a:noFill/>
-          <a:ln/>
-        </p:spPr>
-        <p:txBody>
-          <a:bodyPr wrap="square" lIns="0" tIns="0" rIns="0" bIns="0" rtlCol="0" anchor="ctr"/>
-          <a:lstStyle/>
-          <a:p>
-            <a:pPr indent="0" marL="0">
-              <a:buNone/>
-            </a:pPr>
-            <a:r>
-              <a:rPr lang="en-US" sz="1000" i="1" dirty="0">
-                <a:solidFill>
-                  <a:srgbClr val="CADCFC"/>
-                </a:solidFill>
-              </a:rPr>
-              <a:t>Deterministic order</a:t>
-            </a:r>
-            <a:endParaRPr lang="en-US" sz="1000" dirty="0"/>
-          </a:p>
-        </p:txBody>
-      </p:sp>
-      <p:sp>
-        <p:nvSpPr>
-          <p:cNvPr id="34" name="Text 32"/>
-          <p:cNvSpPr/>
-          <p:nvPr/>
-        </p:nvSpPr>
-        <p:spPr>
-          <a:xfrm>
-            <a:off x="8275320" y="4663440"/>
-            <a:ext cx="3383280" cy="1371600"/>
-          </a:xfrm>
-          <a:prstGeom prst="rect">
-            <a:avLst/>
-          </a:prstGeom>
-          <a:noFill/>
-          <a:ln/>
-        </p:spPr>
-        <p:txBody>
-          <a:bodyPr wrap="square" lIns="0" tIns="0" rIns="0" bIns="0" rtlCol="0" anchor="t"/>
-          <a:lstStyle/>
-          <a:p>
-            <a:pPr indent="0" marL="0">
-              <a:buNone/>
-            </a:pPr>
-            <a:r>
-              <a:rPr lang="en-US" sz="1050" dirty="0">
-                <a:solidFill>
-                  <a:srgbClr val="3A4A60"/>
-                </a:solidFill>
-              </a:rPr>
-              <a:t>1 Stage prompt  →  2 quality-principles  →  3 learned-rules  →  4 program.md  →  5 repo AGENTS.md  →  6 module AGENTS.md.</a:t>
-            </a:r>
-            <a:endParaRPr lang="en-US" sz="1050" dirty="0"/>
-          </a:p>
-        </p:txBody>
-      </p:sp>
-      <p:sp>
-        <p:nvSpPr>
-          <p:cNvPr id="35" name="Text 33"/>
-          <p:cNvSpPr/>
-          <p:nvPr/>
-        </p:nvSpPr>
-        <p:spPr>
-          <a:xfrm>
-            <a:off x="502920" y="6537960"/>
-            <a:ext cx="9144000" cy="274320"/>
-          </a:xfrm>
-          <a:prstGeom prst="rect">
-            <a:avLst/>
-          </a:prstGeom>
-          <a:noFill/>
-          <a:ln/>
-        </p:spPr>
-        <p:txBody>
-          <a:bodyPr wrap="square" lIns="0" tIns="0" rIns="0" bIns="0" rtlCol="0" anchor="ctr"/>
-          <a:lstStyle/>
-          <a:p>
-            <a:pPr indent="0" marL="0">
-              <a:buNone/>
-            </a:pPr>
-            <a:r>
-              <a:rPr lang="en-US" sz="900" dirty="0">
-                <a:solidFill>
-                  <a:srgbClr val="8B9CB8"/>
-                </a:solidFill>
-                <a:latin typeface="Arial" pitchFamily="34" charset="0"/>
-                <a:ea typeface="Arial" pitchFamily="34" charset="-122"/>
-                <a:cs typeface="Arial" pitchFamily="34" charset="-120"/>
-              </a:rPr>
-              <a:t>MAF Modernization Agent  •  AWS Lambda → Azure Functions  •  Design v1.0</a:t>
-            </a:r>
-            <a:endParaRPr lang="en-US" sz="900" dirty="0"/>
-          </a:p>
-        </p:txBody>
-      </p:sp>
-      <p:sp>
-        <p:nvSpPr>
-          <p:cNvPr id="36" name="Text 34"/>
           <p:cNvSpPr/>
           <p:nvPr/>
         </p:nvSpPr>
